--- a/cmd-line-101/file-transfer-draft.pptx
+++ b/cmd-line-101/file-transfer-draft.pptx
@@ -5,23 +5,25 @@
     <p:sldMasterId id="2147483648" r:id="rId1"/>
   </p:sldMasterIdLst>
   <p:notesMasterIdLst>
-    <p:notesMasterId r:id="rId16"/>
+    <p:notesMasterId r:id="rId18"/>
   </p:notesMasterIdLst>
   <p:sldIdLst>
     <p:sldId id="256" r:id="rId2"/>
     <p:sldId id="264" r:id="rId3"/>
     <p:sldId id="265" r:id="rId4"/>
-    <p:sldId id="259" r:id="rId5"/>
-    <p:sldId id="260" r:id="rId6"/>
-    <p:sldId id="261" r:id="rId7"/>
-    <p:sldId id="266" r:id="rId8"/>
-    <p:sldId id="262" r:id="rId9"/>
-    <p:sldId id="267" r:id="rId10"/>
-    <p:sldId id="268" r:id="rId11"/>
-    <p:sldId id="269" r:id="rId12"/>
-    <p:sldId id="271" r:id="rId13"/>
-    <p:sldId id="272" r:id="rId14"/>
-    <p:sldId id="270" r:id="rId15"/>
+    <p:sldId id="273" r:id="rId5"/>
+    <p:sldId id="259" r:id="rId6"/>
+    <p:sldId id="260" r:id="rId7"/>
+    <p:sldId id="261" r:id="rId8"/>
+    <p:sldId id="266" r:id="rId9"/>
+    <p:sldId id="262" r:id="rId10"/>
+    <p:sldId id="267" r:id="rId11"/>
+    <p:sldId id="268" r:id="rId12"/>
+    <p:sldId id="269" r:id="rId13"/>
+    <p:sldId id="271" r:id="rId14"/>
+    <p:sldId id="272" r:id="rId15"/>
+    <p:sldId id="270" r:id="rId16"/>
+    <p:sldId id="274" r:id="rId17"/>
   </p:sldIdLst>
   <p:sldSz cx="12192000" cy="6858000"/>
   <p:notesSz cx="6858000" cy="9144000"/>
@@ -789,7 +791,7 @@
           <a:lstStyle/>
           <a:p>
             <a:fld id="{4CE51DA7-F7B0-6F41-9300-BA9FC6DA2392}" type="slidenum">
-              <a:t>4</a:t>
+              <a:t>5</a:t>
             </a:fld>
             <a:endParaRPr lang="en-US"/>
           </a:p>
@@ -915,7 +917,7 @@
           <a:lstStyle/>
           <a:p>
             <a:fld id="{4CE51DA7-F7B0-6F41-9300-BA9FC6DA2392}" type="slidenum">
-              <a:t>5</a:t>
+              <a:t>6</a:t>
             </a:fld>
             <a:endParaRPr lang="en-US"/>
           </a:p>
@@ -1001,7 +1003,7 @@
           <a:lstStyle/>
           <a:p>
             <a:fld id="{4CE51DA7-F7B0-6F41-9300-BA9FC6DA2392}" type="slidenum">
-              <a:t>6</a:t>
+              <a:t>7</a:t>
             </a:fld>
             <a:endParaRPr lang="en-US"/>
           </a:p>
@@ -4298,6 +4300,355 @@
           <p:cNvPr id="2" name="Title 1">
             <a:extLst>
               <a:ext uri="{FF2B5EF4-FFF2-40B4-BE49-F238E27FC236}">
+                <a16:creationId xmlns:a16="http://schemas.microsoft.com/office/drawing/2014/main" id="{2BA248C4-2FC8-A1A1-3A88-0D9C4F94935B}"/>
+              </a:ext>
+            </a:extLst>
+          </p:cNvPr>
+          <p:cNvSpPr>
+            <a:spLocks noGrp="1"/>
+          </p:cNvSpPr>
+          <p:nvPr>
+            <p:ph type="title"/>
+          </p:nvPr>
+        </p:nvSpPr>
+        <p:spPr/>
+        <p:txBody>
+          <a:bodyPr/>
+          <a:lstStyle/>
+          <a:p>
+            <a:r>
+              <a:rPr lang="en-US"/>
+              <a:t>Mounting labshare to local computer</a:t>
+            </a:r>
+          </a:p>
+        </p:txBody>
+      </p:sp>
+      <p:sp>
+        <p:nvSpPr>
+          <p:cNvPr id="3" name="Content Placeholder 2">
+            <a:extLst>
+              <a:ext uri="{FF2B5EF4-FFF2-40B4-BE49-F238E27FC236}">
+                <a16:creationId xmlns:a16="http://schemas.microsoft.com/office/drawing/2014/main" id="{BC79810C-D812-A3BB-AD05-D961978C0C04}"/>
+              </a:ext>
+            </a:extLst>
+          </p:cNvPr>
+          <p:cNvSpPr>
+            <a:spLocks noGrp="1"/>
+          </p:cNvSpPr>
+          <p:nvPr>
+            <p:ph idx="1"/>
+          </p:nvPr>
+        </p:nvSpPr>
+        <p:spPr/>
+        <p:txBody>
+          <a:bodyPr/>
+          <a:lstStyle/>
+          <a:p>
+            <a:r>
+              <a:rPr lang="en-US"/>
+              <a:t>Only tier 1 and tier 2 storage is mountable, not tier 0 or scratch </a:t>
+            </a:r>
+          </a:p>
+          <a:p>
+            <a:pPr marL="0" indent="0">
+              <a:buNone/>
+            </a:pPr>
+            <a:endParaRPr lang="en-US"/>
+          </a:p>
+          <a:p>
+            <a:pPr marL="0" indent="0">
+              <a:buNone/>
+            </a:pPr>
+            <a:r>
+              <a:rPr lang="en-US"/>
+              <a:t>Steps (no demo)</a:t>
+            </a:r>
+          </a:p>
+          <a:p>
+            <a:pPr marL="514350" indent="-514350">
+              <a:buFont typeface="+mj-lt"/>
+              <a:buAutoNum type="arabicPeriod"/>
+            </a:pPr>
+            <a:r>
+              <a:rPr lang="en-US"/>
+              <a:t>Ask someone in your lab if directions exist, if so complete!</a:t>
+            </a:r>
+          </a:p>
+          <a:p>
+            <a:pPr marL="514350" indent="-514350">
+              <a:buFont typeface="+mj-lt"/>
+              <a:buAutoNum type="arabicPeriod"/>
+            </a:pPr>
+            <a:r>
+              <a:rPr lang="en-US"/>
+              <a:t>Ask FASRC during office hours 😅</a:t>
+            </a:r>
+          </a:p>
+        </p:txBody>
+      </p:sp>
+      <p:grpSp>
+        <p:nvGrpSpPr>
+          <p:cNvPr id="4" name="Group 3">
+            <a:extLst>
+              <a:ext uri="{FF2B5EF4-FFF2-40B4-BE49-F238E27FC236}">
+                <a16:creationId xmlns:a16="http://schemas.microsoft.com/office/drawing/2014/main" id="{5873E92D-27BA-11EF-6EA7-CF75D0DC3C47}"/>
+              </a:ext>
+            </a:extLst>
+          </p:cNvPr>
+          <p:cNvGrpSpPr/>
+          <p:nvPr/>
+        </p:nvGrpSpPr>
+        <p:grpSpPr>
+          <a:xfrm>
+            <a:off x="6229525" y="4391467"/>
+            <a:ext cx="1101648" cy="1283732"/>
+            <a:chOff x="5643892" y="387638"/>
+            <a:chExt cx="1101648" cy="1283732"/>
+          </a:xfrm>
+        </p:grpSpPr>
+        <p:pic>
+          <p:nvPicPr>
+            <p:cNvPr id="5" name="Graphic 4" descr="Server with solid fill">
+              <a:extLst>
+                <a:ext uri="{FF2B5EF4-FFF2-40B4-BE49-F238E27FC236}">
+                  <a16:creationId xmlns:a16="http://schemas.microsoft.com/office/drawing/2014/main" id="{03536E63-5F3C-5203-B56A-B3BB466C9256}"/>
+                </a:ext>
+              </a:extLst>
+            </p:cNvPr>
+            <p:cNvPicPr>
+              <a:picLocks noChangeAspect="1"/>
+            </p:cNvPicPr>
+            <p:nvPr/>
+          </p:nvPicPr>
+          <p:blipFill>
+            <a:blip r:embed="rId2">
+              <a:extLst>
+                <a:ext uri="{96DAC541-7B7A-43D3-8B79-37D633B846F1}">
+                  <asvg:svgBlip xmlns:asvg="http://schemas.microsoft.com/office/drawing/2016/SVG/main" r:embed="rId3"/>
+                </a:ext>
+              </a:extLst>
+            </a:blip>
+            <a:stretch>
+              <a:fillRect/>
+            </a:stretch>
+          </p:blipFill>
+          <p:spPr>
+            <a:xfrm>
+              <a:off x="5737516" y="387638"/>
+              <a:ext cx="914400" cy="914400"/>
+            </a:xfrm>
+            <a:prstGeom prst="rect">
+              <a:avLst/>
+            </a:prstGeom>
+          </p:spPr>
+        </p:pic>
+        <p:sp>
+          <p:nvSpPr>
+            <p:cNvPr id="6" name="TextBox 5">
+              <a:extLst>
+                <a:ext uri="{FF2B5EF4-FFF2-40B4-BE49-F238E27FC236}">
+                  <a16:creationId xmlns:a16="http://schemas.microsoft.com/office/drawing/2014/main" id="{D9CE85B7-EAE1-3660-3D8C-97B0BCF99685}"/>
+                </a:ext>
+              </a:extLst>
+            </p:cNvPr>
+            <p:cNvSpPr txBox="1"/>
+            <p:nvPr/>
+          </p:nvSpPr>
+          <p:spPr>
+            <a:xfrm>
+              <a:off x="5643892" y="1302038"/>
+              <a:ext cx="1101648" cy="369332"/>
+            </a:xfrm>
+            <a:prstGeom prst="rect">
+              <a:avLst/>
+            </a:prstGeom>
+            <a:noFill/>
+          </p:spPr>
+          <p:txBody>
+            <a:bodyPr wrap="none" rtlCol="0">
+              <a:spAutoFit/>
+            </a:bodyPr>
+            <a:lstStyle/>
+            <a:p>
+              <a:r>
+                <a:rPr lang="en-US"/>
+                <a:t>lab share</a:t>
+              </a:r>
+            </a:p>
+          </p:txBody>
+        </p:sp>
+      </p:grpSp>
+      <p:grpSp>
+        <p:nvGrpSpPr>
+          <p:cNvPr id="7" name="Group 6">
+            <a:extLst>
+              <a:ext uri="{FF2B5EF4-FFF2-40B4-BE49-F238E27FC236}">
+                <a16:creationId xmlns:a16="http://schemas.microsoft.com/office/drawing/2014/main" id="{3C4FF97E-AF53-80E4-918B-9354BB3016A7}"/>
+              </a:ext>
+            </a:extLst>
+          </p:cNvPr>
+          <p:cNvGrpSpPr/>
+          <p:nvPr/>
+        </p:nvGrpSpPr>
+        <p:grpSpPr>
+          <a:xfrm>
+            <a:off x="9479230" y="4391467"/>
+            <a:ext cx="1161344" cy="1099066"/>
+            <a:chOff x="2170185" y="4087564"/>
+            <a:chExt cx="1161344" cy="1099066"/>
+          </a:xfrm>
+        </p:grpSpPr>
+        <p:sp>
+          <p:nvSpPr>
+            <p:cNvPr id="8" name="TextBox 7">
+              <a:extLst>
+                <a:ext uri="{FF2B5EF4-FFF2-40B4-BE49-F238E27FC236}">
+                  <a16:creationId xmlns:a16="http://schemas.microsoft.com/office/drawing/2014/main" id="{DEA31A3D-6242-701A-5E13-23459AFDD18F}"/>
+                </a:ext>
+              </a:extLst>
+            </p:cNvPr>
+            <p:cNvSpPr txBox="1"/>
+            <p:nvPr/>
+          </p:nvSpPr>
+          <p:spPr>
+            <a:xfrm>
+              <a:off x="2170185" y="4817298"/>
+              <a:ext cx="1161344" cy="369332"/>
+            </a:xfrm>
+            <a:prstGeom prst="rect">
+              <a:avLst/>
+            </a:prstGeom>
+            <a:noFill/>
+          </p:spPr>
+          <p:txBody>
+            <a:bodyPr wrap="none" rtlCol="0">
+              <a:spAutoFit/>
+            </a:bodyPr>
+            <a:lstStyle/>
+            <a:p>
+              <a:r>
+                <a:rPr lang="en-US"/>
+                <a:t>computer</a:t>
+              </a:r>
+            </a:p>
+          </p:txBody>
+        </p:sp>
+        <p:pic>
+          <p:nvPicPr>
+            <p:cNvPr id="9" name="Graphic 8" descr="Computer with solid fill">
+              <a:extLst>
+                <a:ext uri="{FF2B5EF4-FFF2-40B4-BE49-F238E27FC236}">
+                  <a16:creationId xmlns:a16="http://schemas.microsoft.com/office/drawing/2014/main" id="{54F769C9-F758-C69B-9AD7-B13CA7261AD5}"/>
+                </a:ext>
+              </a:extLst>
+            </p:cNvPr>
+            <p:cNvPicPr>
+              <a:picLocks noChangeAspect="1"/>
+            </p:cNvPicPr>
+            <p:nvPr/>
+          </p:nvPicPr>
+          <p:blipFill>
+            <a:blip r:embed="rId4">
+              <a:extLst>
+                <a:ext uri="{96DAC541-7B7A-43D3-8B79-37D633B846F1}">
+                  <asvg:svgBlip xmlns:asvg="http://schemas.microsoft.com/office/drawing/2016/SVG/main" r:embed="rId5"/>
+                </a:ext>
+              </a:extLst>
+            </a:blip>
+            <a:stretch>
+              <a:fillRect/>
+            </a:stretch>
+          </p:blipFill>
+          <p:spPr>
+            <a:xfrm>
+              <a:off x="2293657" y="4087564"/>
+              <a:ext cx="914400" cy="914400"/>
+            </a:xfrm>
+            <a:prstGeom prst="rect">
+              <a:avLst/>
+            </a:prstGeom>
+          </p:spPr>
+        </p:pic>
+      </p:grpSp>
+      <p:cxnSp>
+        <p:nvCxnSpPr>
+          <p:cNvPr id="10" name="Straight Arrow Connector 9">
+            <a:extLst>
+              <a:ext uri="{FF2B5EF4-FFF2-40B4-BE49-F238E27FC236}">
+                <a16:creationId xmlns:a16="http://schemas.microsoft.com/office/drawing/2014/main" id="{35459D6D-8F63-59CB-8D0C-D7C91EDB0B71}"/>
+              </a:ext>
+            </a:extLst>
+          </p:cNvPr>
+          <p:cNvCxnSpPr>
+            <a:cxnSpLocks/>
+            <a:stCxn id="9" idx="1"/>
+            <a:endCxn id="5" idx="3"/>
+          </p:cNvCxnSpPr>
+          <p:nvPr/>
+        </p:nvCxnSpPr>
+        <p:spPr>
+          <a:xfrm flipH="1">
+            <a:off x="7237549" y="4848667"/>
+            <a:ext cx="2365153" cy="0"/>
+          </a:xfrm>
+          <a:prstGeom prst="straightConnector1">
+            <a:avLst/>
+          </a:prstGeom>
+          <a:ln w="38100">
+            <a:headEnd type="triangle"/>
+            <a:tailEnd type="triangle"/>
+          </a:ln>
+        </p:spPr>
+        <p:style>
+          <a:lnRef idx="2">
+            <a:schemeClr val="dk1"/>
+          </a:lnRef>
+          <a:fillRef idx="0">
+            <a:schemeClr val="dk1"/>
+          </a:fillRef>
+          <a:effectRef idx="1">
+            <a:schemeClr val="dk1"/>
+          </a:effectRef>
+          <a:fontRef idx="minor">
+            <a:schemeClr val="tx1"/>
+          </a:fontRef>
+        </p:style>
+      </p:cxnSp>
+    </p:spTree>
+    <p:extLst>
+      <p:ext uri="{BB962C8B-B14F-4D97-AF65-F5344CB8AC3E}">
+        <p14:creationId xmlns:p14="http://schemas.microsoft.com/office/powerpoint/2010/main" val="2802243993"/>
+      </p:ext>
+    </p:extLst>
+  </p:cSld>
+  <p:clrMapOvr>
+    <a:masterClrMapping/>
+  </p:clrMapOvr>
+</p:sld>
+</file>
+
+<file path=ppt/slides/slide11.xml><?xml version="1.0" encoding="utf-8"?>
+<p:sld xmlns:a="http://schemas.openxmlformats.org/drawingml/2006/main" xmlns:r="http://schemas.openxmlformats.org/officeDocument/2006/relationships" xmlns:p="http://schemas.openxmlformats.org/presentationml/2006/main">
+  <p:cSld>
+    <p:spTree>
+      <p:nvGrpSpPr>
+        <p:cNvPr id="1" name=""/>
+        <p:cNvGrpSpPr/>
+        <p:nvPr/>
+      </p:nvGrpSpPr>
+      <p:grpSpPr>
+        <a:xfrm>
+          <a:off x="0" y="0"/>
+          <a:ext cx="0" cy="0"/>
+          <a:chOff x="0" y="0"/>
+          <a:chExt cx="0" cy="0"/>
+        </a:xfrm>
+      </p:grpSpPr>
+      <p:sp>
+        <p:nvSpPr>
+          <p:cNvPr id="2" name="Title 1">
+            <a:extLst>
+              <a:ext uri="{FF2B5EF4-FFF2-40B4-BE49-F238E27FC236}">
                 <a16:creationId xmlns:a16="http://schemas.microsoft.com/office/drawing/2014/main" id="{6B8C3352-EDA4-E6F7-BD29-7EF02ED09C07}"/>
               </a:ext>
             </a:extLst>
@@ -5042,7 +5393,7 @@
 </p:sld>
 </file>
 
-<file path=ppt/slides/slide11.xml><?xml version="1.0" encoding="utf-8"?>
+<file path=ppt/slides/slide12.xml><?xml version="1.0" encoding="utf-8"?>
 <p:sld xmlns:a="http://schemas.openxmlformats.org/drawingml/2006/main" xmlns:r="http://schemas.openxmlformats.org/officeDocument/2006/relationships" xmlns:p="http://schemas.openxmlformats.org/presentationml/2006/main">
   <p:cSld>
     <p:spTree>
@@ -5266,89 +5617,6 @@
 </p:sld>
 </file>
 
-<file path=ppt/slides/slide12.xml><?xml version="1.0" encoding="utf-8"?>
-<p:sld xmlns:a="http://schemas.openxmlformats.org/drawingml/2006/main" xmlns:r="http://schemas.openxmlformats.org/officeDocument/2006/relationships" xmlns:p="http://schemas.openxmlformats.org/presentationml/2006/main">
-  <p:cSld>
-    <p:spTree>
-      <p:nvGrpSpPr>
-        <p:cNvPr id="1" name=""/>
-        <p:cNvGrpSpPr/>
-        <p:nvPr/>
-      </p:nvGrpSpPr>
-      <p:grpSpPr>
-        <a:xfrm>
-          <a:off x="0" y="0"/>
-          <a:ext cx="0" cy="0"/>
-          <a:chOff x="0" y="0"/>
-          <a:chExt cx="0" cy="0"/>
-        </a:xfrm>
-      </p:grpSpPr>
-      <p:sp>
-        <p:nvSpPr>
-          <p:cNvPr id="2" name="Title 1">
-            <a:extLst>
-              <a:ext uri="{FF2B5EF4-FFF2-40B4-BE49-F238E27FC236}">
-                <a16:creationId xmlns:a16="http://schemas.microsoft.com/office/drawing/2014/main" id="{36A638FC-AF03-5AD1-8B75-BF5CB035578A}"/>
-              </a:ext>
-            </a:extLst>
-          </p:cNvPr>
-          <p:cNvSpPr>
-            <a:spLocks noGrp="1"/>
-          </p:cNvSpPr>
-          <p:nvPr>
-            <p:ph type="title"/>
-          </p:nvPr>
-        </p:nvSpPr>
-        <p:spPr/>
-        <p:txBody>
-          <a:bodyPr/>
-          <a:lstStyle/>
-          <a:p>
-            <a:r>
-              <a:rPr lang="en-US"/>
-              <a:t>Create globus collections to share data</a:t>
-            </a:r>
-          </a:p>
-        </p:txBody>
-      </p:sp>
-      <p:sp>
-        <p:nvSpPr>
-          <p:cNvPr id="3" name="Content Placeholder 2">
-            <a:extLst>
-              <a:ext uri="{FF2B5EF4-FFF2-40B4-BE49-F238E27FC236}">
-                <a16:creationId xmlns:a16="http://schemas.microsoft.com/office/drawing/2014/main" id="{C800879E-FC09-152D-AED5-DD1A9FC64636}"/>
-              </a:ext>
-            </a:extLst>
-          </p:cNvPr>
-          <p:cNvSpPr>
-            <a:spLocks noGrp="1"/>
-          </p:cNvSpPr>
-          <p:nvPr>
-            <p:ph idx="1"/>
-          </p:nvPr>
-        </p:nvSpPr>
-        <p:spPr/>
-        <p:txBody>
-          <a:bodyPr/>
-          <a:lstStyle/>
-          <a:p>
-            <a:endParaRPr lang="en-US"/>
-          </a:p>
-        </p:txBody>
-      </p:sp>
-    </p:spTree>
-    <p:extLst>
-      <p:ext uri="{BB962C8B-B14F-4D97-AF65-F5344CB8AC3E}">
-        <p14:creationId xmlns:p14="http://schemas.microsoft.com/office/powerpoint/2010/main" val="2459291593"/>
-      </p:ext>
-    </p:extLst>
-  </p:cSld>
-  <p:clrMapOvr>
-    <a:masterClrMapping/>
-  </p:clrMapOvr>
-</p:sld>
-</file>
-
 <file path=ppt/slides/slide13.xml><?xml version="1.0" encoding="utf-8"?>
 <p:sld xmlns:a="http://schemas.openxmlformats.org/drawingml/2006/main" xmlns:r="http://schemas.openxmlformats.org/officeDocument/2006/relationships" xmlns:p="http://schemas.openxmlformats.org/presentationml/2006/main">
   <p:cSld>
@@ -5371,7 +5639,7 @@
           <p:cNvPr id="2" name="Title 1">
             <a:extLst>
               <a:ext uri="{FF2B5EF4-FFF2-40B4-BE49-F238E27FC236}">
-                <a16:creationId xmlns:a16="http://schemas.microsoft.com/office/drawing/2014/main" id="{DCFD36AB-B15A-7658-D2C7-3EBF09E38A72}"/>
+                <a16:creationId xmlns:a16="http://schemas.microsoft.com/office/drawing/2014/main" id="{36A638FC-AF03-5AD1-8B75-BF5CB035578A}"/>
               </a:ext>
             </a:extLst>
           </p:cNvPr>
@@ -5388,9 +5656,12 @@
           <a:lstStyle/>
           <a:p>
             <a:r>
-              <a:rPr lang="en-US"/>
-              <a:t>Use globus connect personal to transfer locally</a:t>
-            </a:r>
+              <a:rPr lang="en-US">
+                <a:hlinkClick r:id="rId2"/>
+              </a:rPr>
+              <a:t>Create globus collections to share data</a:t>
+            </a:r>
+            <a:endParaRPr lang="en-US"/>
           </a:p>
         </p:txBody>
       </p:sp>
@@ -5399,7 +5670,7 @@
           <p:cNvPr id="3" name="Content Placeholder 2">
             <a:extLst>
               <a:ext uri="{FF2B5EF4-FFF2-40B4-BE49-F238E27FC236}">
-                <a16:creationId xmlns:a16="http://schemas.microsoft.com/office/drawing/2014/main" id="{6F8DC944-EB32-77DD-4BCE-55270BAAAD62}"/>
+                <a16:creationId xmlns:a16="http://schemas.microsoft.com/office/drawing/2014/main" id="{C800879E-FC09-152D-AED5-DD1A9FC64636}"/>
               </a:ext>
             </a:extLst>
           </p:cNvPr>
@@ -5410,19 +5681,50 @@
             <p:ph idx="1"/>
           </p:nvPr>
         </p:nvSpPr>
-        <p:spPr/>
+        <p:spPr>
+          <a:xfrm>
+            <a:off x="838200" y="1452282"/>
+            <a:ext cx="10515600" cy="5163671"/>
+          </a:xfrm>
+        </p:spPr>
         <p:txBody>
-          <a:bodyPr/>
+          <a:bodyPr>
+            <a:normAutofit/>
+          </a:bodyPr>
           <a:lstStyle/>
           <a:p>
-            <a:endParaRPr lang="en-US"/>
+            <a:pPr marL="0" indent="0">
+              <a:buNone/>
+            </a:pPr>
+            <a:r>
+              <a:rPr lang="en-US"/>
+              <a:t>Demo</a:t>
+            </a:r>
+          </a:p>
+          <a:p>
+            <a:r>
+              <a:rPr lang="en-US"/>
+              <a:t>Great way to share with collaborates internal and external to Harvard</a:t>
+            </a:r>
+          </a:p>
+          <a:p>
+            <a:r>
+              <a:rPr lang="en-US"/>
+              <a:t>Collaborates have read-only access so they can copy out but can’t modify</a:t>
+            </a:r>
+          </a:p>
+          <a:p>
+            <a:r>
+              <a:rPr lang="en-US"/>
+              <a:t>Only shares from the pi_lab/Lab or pi_lab/User directory</a:t>
+            </a:r>
           </a:p>
         </p:txBody>
       </p:sp>
     </p:spTree>
     <p:extLst>
       <p:ext uri="{BB962C8B-B14F-4D97-AF65-F5344CB8AC3E}">
-        <p14:creationId xmlns:p14="http://schemas.microsoft.com/office/powerpoint/2010/main" val="2987665117"/>
+        <p14:creationId xmlns:p14="http://schemas.microsoft.com/office/powerpoint/2010/main" val="2459291593"/>
       </p:ext>
     </p:extLst>
   </p:cSld>
@@ -5454,7 +5756,7 @@
           <p:cNvPr id="2" name="Title 1">
             <a:extLst>
               <a:ext uri="{FF2B5EF4-FFF2-40B4-BE49-F238E27FC236}">
-                <a16:creationId xmlns:a16="http://schemas.microsoft.com/office/drawing/2014/main" id="{DC3769EA-BD43-F748-482F-3541345A921F}"/>
+                <a16:creationId xmlns:a16="http://schemas.microsoft.com/office/drawing/2014/main" id="{DCFD36AB-B15A-7658-D2C7-3EBF09E38A72}"/>
               </a:ext>
             </a:extLst>
           </p:cNvPr>
@@ -5472,7 +5774,7 @@
           <a:p>
             <a:r>
               <a:rPr lang="en-US"/>
-              <a:t>Globus tips</a:t>
+              <a:t>Use globus connect personal to transfer locally</a:t>
             </a:r>
           </a:p>
         </p:txBody>
@@ -5482,7 +5784,7 @@
           <p:cNvPr id="3" name="Content Placeholder 2">
             <a:extLst>
               <a:ext uri="{FF2B5EF4-FFF2-40B4-BE49-F238E27FC236}">
-                <a16:creationId xmlns:a16="http://schemas.microsoft.com/office/drawing/2014/main" id="{5089333B-A9FE-C303-B441-E0E42201AA1F}"/>
+                <a16:creationId xmlns:a16="http://schemas.microsoft.com/office/drawing/2014/main" id="{6F8DC944-EB32-77DD-4BCE-55270BAAAD62}"/>
               </a:ext>
             </a:extLst>
           </p:cNvPr>
@@ -5498,15 +5800,52 @@
           <a:bodyPr/>
           <a:lstStyle/>
           <a:p>
-            <a:r>
-              <a:rPr lang="en-US"/>
-              <a:t>Bookmark your scratch and lab directory</a:t>
-            </a:r>
-          </a:p>
-          <a:p>
-            <a:r>
-              <a:rPr lang="en-US"/>
-              <a:t>Set up automatic file sync to back up files</a:t>
+            <a:pPr marL="0" indent="0">
+              <a:buNone/>
+            </a:pPr>
+            <a:r>
+              <a:rPr lang="en-US"/>
+              <a:t>Demo</a:t>
+            </a:r>
+          </a:p>
+          <a:p>
+            <a:pPr marL="514350" indent="-514350">
+              <a:buFont typeface="+mj-lt"/>
+              <a:buAutoNum type="arabicPeriod"/>
+            </a:pPr>
+            <a:r>
+              <a:rPr lang="en-US"/>
+              <a:t>Download globus connect personal</a:t>
+            </a:r>
+          </a:p>
+          <a:p>
+            <a:pPr marL="514350" indent="-514350">
+              <a:buFont typeface="+mj-lt"/>
+              <a:buAutoNum type="arabicPeriod"/>
+            </a:pPr>
+            <a:r>
+              <a:rPr lang="en-US"/>
+              <a:t>Log in using your HarvardKey</a:t>
+            </a:r>
+          </a:p>
+          <a:p>
+            <a:pPr marL="514350" indent="-514350">
+              <a:buFont typeface="+mj-lt"/>
+              <a:buAutoNum type="arabicPeriod"/>
+            </a:pPr>
+            <a:r>
+              <a:rPr lang="en-US"/>
+              <a:t>Choose which folder(s) to share</a:t>
+            </a:r>
+          </a:p>
+          <a:p>
+            <a:pPr marL="514350" indent="-514350">
+              <a:buFont typeface="+mj-lt"/>
+              <a:buAutoNum type="arabicPeriod"/>
+            </a:pPr>
+            <a:r>
+              <a:rPr lang="en-US"/>
+              <a:t>You can now use Globus to transfer from any other collection to your computer</a:t>
             </a:r>
           </a:p>
         </p:txBody>
@@ -5514,7 +5853,1150 @@
     </p:spTree>
     <p:extLst>
       <p:ext uri="{BB962C8B-B14F-4D97-AF65-F5344CB8AC3E}">
+        <p14:creationId xmlns:p14="http://schemas.microsoft.com/office/powerpoint/2010/main" val="2987665117"/>
+      </p:ext>
+    </p:extLst>
+  </p:cSld>
+  <p:clrMapOvr>
+    <a:masterClrMapping/>
+  </p:clrMapOvr>
+</p:sld>
+</file>
+
+<file path=ppt/slides/slide15.xml><?xml version="1.0" encoding="utf-8"?>
+<p:sld xmlns:a="http://schemas.openxmlformats.org/drawingml/2006/main" xmlns:r="http://schemas.openxmlformats.org/officeDocument/2006/relationships" xmlns:p="http://schemas.openxmlformats.org/presentationml/2006/main">
+  <p:cSld>
+    <p:spTree>
+      <p:nvGrpSpPr>
+        <p:cNvPr id="1" name=""/>
+        <p:cNvGrpSpPr/>
+        <p:nvPr/>
+      </p:nvGrpSpPr>
+      <p:grpSpPr>
+        <a:xfrm>
+          <a:off x="0" y="0"/>
+          <a:ext cx="0" cy="0"/>
+          <a:chOff x="0" y="0"/>
+          <a:chExt cx="0" cy="0"/>
+        </a:xfrm>
+      </p:grpSpPr>
+      <p:sp>
+        <p:nvSpPr>
+          <p:cNvPr id="2" name="Title 1">
+            <a:extLst>
+              <a:ext uri="{FF2B5EF4-FFF2-40B4-BE49-F238E27FC236}">
+                <a16:creationId xmlns:a16="http://schemas.microsoft.com/office/drawing/2014/main" id="{DC3769EA-BD43-F748-482F-3541345A921F}"/>
+              </a:ext>
+            </a:extLst>
+          </p:cNvPr>
+          <p:cNvSpPr>
+            <a:spLocks noGrp="1"/>
+          </p:cNvSpPr>
+          <p:nvPr>
+            <p:ph type="title"/>
+          </p:nvPr>
+        </p:nvSpPr>
+        <p:spPr/>
+        <p:txBody>
+          <a:bodyPr/>
+          <a:lstStyle/>
+          <a:p>
+            <a:r>
+              <a:rPr lang="en-US"/>
+              <a:t>Globus tips</a:t>
+            </a:r>
+          </a:p>
+        </p:txBody>
+      </p:sp>
+      <p:sp>
+        <p:nvSpPr>
+          <p:cNvPr id="3" name="Content Placeholder 2">
+            <a:extLst>
+              <a:ext uri="{FF2B5EF4-FFF2-40B4-BE49-F238E27FC236}">
+                <a16:creationId xmlns:a16="http://schemas.microsoft.com/office/drawing/2014/main" id="{5089333B-A9FE-C303-B441-E0E42201AA1F}"/>
+              </a:ext>
+            </a:extLst>
+          </p:cNvPr>
+          <p:cNvSpPr>
+            <a:spLocks noGrp="1"/>
+          </p:cNvSpPr>
+          <p:nvPr>
+            <p:ph idx="1"/>
+          </p:nvPr>
+        </p:nvSpPr>
+        <p:spPr/>
+        <p:txBody>
+          <a:bodyPr/>
+          <a:lstStyle/>
+          <a:p>
+            <a:r>
+              <a:rPr lang="en-US"/>
+              <a:t>Bookmark your scratch and lab directory</a:t>
+            </a:r>
+          </a:p>
+          <a:p>
+            <a:r>
+              <a:rPr lang="en-US"/>
+              <a:t>Set up automatic file sync to back up files</a:t>
+            </a:r>
+          </a:p>
+          <a:p>
+            <a:r>
+              <a:rPr lang="en-US"/>
+              <a:t>Write down your lab’s Globus protocols</a:t>
+            </a:r>
+          </a:p>
+        </p:txBody>
+      </p:sp>
+      <p:grpSp>
+        <p:nvGrpSpPr>
+          <p:cNvPr id="4" name="Group 3">
+            <a:extLst>
+              <a:ext uri="{FF2B5EF4-FFF2-40B4-BE49-F238E27FC236}">
+                <a16:creationId xmlns:a16="http://schemas.microsoft.com/office/drawing/2014/main" id="{FAF0C95C-EFE5-BA5A-49FA-DE6E554FD86B}"/>
+              </a:ext>
+            </a:extLst>
+          </p:cNvPr>
+          <p:cNvGrpSpPr/>
+          <p:nvPr/>
+        </p:nvGrpSpPr>
+        <p:grpSpPr>
+          <a:xfrm>
+            <a:off x="7125269" y="541893"/>
+            <a:ext cx="1255728" cy="1283732"/>
+            <a:chOff x="3032551" y="387638"/>
+            <a:chExt cx="1255728" cy="1283732"/>
+          </a:xfrm>
+        </p:grpSpPr>
+        <p:pic>
+          <p:nvPicPr>
+            <p:cNvPr id="5" name="Graphic 4" descr="Server with solid fill">
+              <a:extLst>
+                <a:ext uri="{FF2B5EF4-FFF2-40B4-BE49-F238E27FC236}">
+                  <a16:creationId xmlns:a16="http://schemas.microsoft.com/office/drawing/2014/main" id="{2674098E-87A7-D8BC-EC11-A4A77BB9EE5C}"/>
+                </a:ext>
+              </a:extLst>
+            </p:cNvPr>
+            <p:cNvPicPr>
+              <a:picLocks noChangeAspect="1"/>
+            </p:cNvPicPr>
+            <p:nvPr/>
+          </p:nvPicPr>
+          <p:blipFill>
+            <a:blip r:embed="rId2">
+              <a:extLst>
+                <a:ext uri="{96DAC541-7B7A-43D3-8B79-37D633B846F1}">
+                  <asvg:svgBlip xmlns:asvg="http://schemas.microsoft.com/office/drawing/2016/SVG/main" r:embed="rId3"/>
+                </a:ext>
+              </a:extLst>
+            </a:blip>
+            <a:stretch>
+              <a:fillRect/>
+            </a:stretch>
+          </p:blipFill>
+          <p:spPr>
+            <a:xfrm>
+              <a:off x="3203215" y="387638"/>
+              <a:ext cx="914400" cy="914400"/>
+            </a:xfrm>
+            <a:prstGeom prst="rect">
+              <a:avLst/>
+            </a:prstGeom>
+          </p:spPr>
+        </p:pic>
+        <p:sp>
+          <p:nvSpPr>
+            <p:cNvPr id="6" name="TextBox 5">
+              <a:extLst>
+                <a:ext uri="{FF2B5EF4-FFF2-40B4-BE49-F238E27FC236}">
+                  <a16:creationId xmlns:a16="http://schemas.microsoft.com/office/drawing/2014/main" id="{F096BC3C-0F72-A443-AE70-497EE78468DA}"/>
+                </a:ext>
+              </a:extLst>
+            </p:cNvPr>
+            <p:cNvSpPr txBox="1"/>
+            <p:nvPr/>
+          </p:nvSpPr>
+          <p:spPr>
+            <a:xfrm>
+              <a:off x="3032551" y="1302038"/>
+              <a:ext cx="1255728" cy="369332"/>
+            </a:xfrm>
+            <a:prstGeom prst="rect">
+              <a:avLst/>
+            </a:prstGeom>
+            <a:noFill/>
+          </p:spPr>
+          <p:txBody>
+            <a:bodyPr wrap="none" rtlCol="0">
+              <a:spAutoFit/>
+            </a:bodyPr>
+            <a:lstStyle/>
+            <a:p>
+              <a:r>
+                <a:rPr lang="en-US"/>
+                <a:t>netscratch</a:t>
+              </a:r>
+            </a:p>
+          </p:txBody>
+        </p:sp>
+      </p:grpSp>
+      <p:grpSp>
+        <p:nvGrpSpPr>
+          <p:cNvPr id="7" name="Group 6">
+            <a:extLst>
+              <a:ext uri="{FF2B5EF4-FFF2-40B4-BE49-F238E27FC236}">
+                <a16:creationId xmlns:a16="http://schemas.microsoft.com/office/drawing/2014/main" id="{9EFFD945-FB63-DAD3-0AF5-1CE1F3722D51}"/>
+              </a:ext>
+            </a:extLst>
+          </p:cNvPr>
+          <p:cNvGrpSpPr/>
+          <p:nvPr/>
+        </p:nvGrpSpPr>
+        <p:grpSpPr>
+          <a:xfrm>
+            <a:off x="9019247" y="541893"/>
+            <a:ext cx="1735347" cy="1560731"/>
+            <a:chOff x="5643892" y="387638"/>
+            <a:chExt cx="1735347" cy="1560731"/>
+          </a:xfrm>
+        </p:grpSpPr>
+        <p:pic>
+          <p:nvPicPr>
+            <p:cNvPr id="8" name="Graphic 7" descr="Server with solid fill">
+              <a:extLst>
+                <a:ext uri="{FF2B5EF4-FFF2-40B4-BE49-F238E27FC236}">
+                  <a16:creationId xmlns:a16="http://schemas.microsoft.com/office/drawing/2014/main" id="{359013F8-336D-057C-8647-9E89B8A953C8}"/>
+                </a:ext>
+              </a:extLst>
+            </p:cNvPr>
+            <p:cNvPicPr>
+              <a:picLocks noChangeAspect="1"/>
+            </p:cNvPicPr>
+            <p:nvPr/>
+          </p:nvPicPr>
+          <p:blipFill>
+            <a:blip r:embed="rId4">
+              <a:extLst>
+                <a:ext uri="{96DAC541-7B7A-43D3-8B79-37D633B846F1}">
+                  <asvg:svgBlip xmlns:asvg="http://schemas.microsoft.com/office/drawing/2016/SVG/main" r:embed="rId5"/>
+                </a:ext>
+              </a:extLst>
+            </a:blip>
+            <a:stretch>
+              <a:fillRect/>
+            </a:stretch>
+          </p:blipFill>
+          <p:spPr>
+            <a:xfrm>
+              <a:off x="5737516" y="387638"/>
+              <a:ext cx="914400" cy="914400"/>
+            </a:xfrm>
+            <a:prstGeom prst="rect">
+              <a:avLst/>
+            </a:prstGeom>
+          </p:spPr>
+        </p:pic>
+        <p:sp>
+          <p:nvSpPr>
+            <p:cNvPr id="9" name="TextBox 8">
+              <a:extLst>
+                <a:ext uri="{FF2B5EF4-FFF2-40B4-BE49-F238E27FC236}">
+                  <a16:creationId xmlns:a16="http://schemas.microsoft.com/office/drawing/2014/main" id="{54849750-8514-ED14-E1C3-4935297C84F8}"/>
+                </a:ext>
+              </a:extLst>
+            </p:cNvPr>
+            <p:cNvSpPr txBox="1"/>
+            <p:nvPr/>
+          </p:nvSpPr>
+          <p:spPr>
+            <a:xfrm>
+              <a:off x="5643892" y="1302038"/>
+              <a:ext cx="1735347" cy="646331"/>
+            </a:xfrm>
+            <a:prstGeom prst="rect">
+              <a:avLst/>
+            </a:prstGeom>
+            <a:noFill/>
+          </p:spPr>
+          <p:txBody>
+            <a:bodyPr wrap="none" rtlCol="0">
+              <a:spAutoFit/>
+            </a:bodyPr>
+            <a:lstStyle/>
+            <a:p>
+              <a:r>
+                <a:rPr lang="en-US"/>
+                <a:t>lab share</a:t>
+              </a:r>
+            </a:p>
+            <a:p>
+              <a:r>
+                <a:rPr lang="en-US" b="1"/>
+                <a:t>Lab folder only</a:t>
+              </a:r>
+            </a:p>
+          </p:txBody>
+        </p:sp>
+      </p:grpSp>
+      <p:grpSp>
+        <p:nvGrpSpPr>
+          <p:cNvPr id="10" name="Group 9">
+            <a:extLst>
+              <a:ext uri="{FF2B5EF4-FFF2-40B4-BE49-F238E27FC236}">
+                <a16:creationId xmlns:a16="http://schemas.microsoft.com/office/drawing/2014/main" id="{ED1E7B24-F449-F2F6-A5AA-B7EFE3E47DB3}"/>
+              </a:ext>
+            </a:extLst>
+          </p:cNvPr>
+          <p:cNvGrpSpPr/>
+          <p:nvPr/>
+        </p:nvGrpSpPr>
+        <p:grpSpPr>
+          <a:xfrm>
+            <a:off x="10883339" y="541893"/>
+            <a:ext cx="914400" cy="1283732"/>
+            <a:chOff x="8288401" y="387638"/>
+            <a:chExt cx="914400" cy="1283732"/>
+          </a:xfrm>
+        </p:grpSpPr>
+        <p:pic>
+          <p:nvPicPr>
+            <p:cNvPr id="11" name="Graphic 10" descr="Server with solid fill">
+              <a:extLst>
+                <a:ext uri="{FF2B5EF4-FFF2-40B4-BE49-F238E27FC236}">
+                  <a16:creationId xmlns:a16="http://schemas.microsoft.com/office/drawing/2014/main" id="{77B8CA5D-1255-85AE-F43B-1F71DD02E142}"/>
+                </a:ext>
+              </a:extLst>
+            </p:cNvPr>
+            <p:cNvPicPr>
+              <a:picLocks noChangeAspect="1"/>
+            </p:cNvPicPr>
+            <p:nvPr/>
+          </p:nvPicPr>
+          <p:blipFill>
+            <a:blip r:embed="rId6">
+              <a:extLst>
+                <a:ext uri="{96DAC541-7B7A-43D3-8B79-37D633B846F1}">
+                  <asvg:svgBlip xmlns:asvg="http://schemas.microsoft.com/office/drawing/2016/SVG/main" r:embed="rId7"/>
+                </a:ext>
+              </a:extLst>
+            </a:blip>
+            <a:stretch>
+              <a:fillRect/>
+            </a:stretch>
+          </p:blipFill>
+          <p:spPr>
+            <a:xfrm>
+              <a:off x="8288401" y="387638"/>
+              <a:ext cx="914400" cy="914400"/>
+            </a:xfrm>
+            <a:prstGeom prst="rect">
+              <a:avLst/>
+            </a:prstGeom>
+          </p:spPr>
+        </p:pic>
+        <p:sp>
+          <p:nvSpPr>
+            <p:cNvPr id="12" name="TextBox 11">
+              <a:extLst>
+                <a:ext uri="{FF2B5EF4-FFF2-40B4-BE49-F238E27FC236}">
+                  <a16:creationId xmlns:a16="http://schemas.microsoft.com/office/drawing/2014/main" id="{481F5A5E-2CC2-B6DD-0D4A-8C6FF1CFF250}"/>
+                </a:ext>
+              </a:extLst>
+            </p:cNvPr>
+            <p:cNvSpPr txBox="1"/>
+            <p:nvPr/>
+          </p:nvSpPr>
+          <p:spPr>
+            <a:xfrm>
+              <a:off x="8428494" y="1302038"/>
+              <a:ext cx="634213" cy="369332"/>
+            </a:xfrm>
+            <a:prstGeom prst="rect">
+              <a:avLst/>
+            </a:prstGeom>
+            <a:noFill/>
+          </p:spPr>
+          <p:txBody>
+            <a:bodyPr wrap="none" rtlCol="0">
+              <a:spAutoFit/>
+            </a:bodyPr>
+            <a:lstStyle/>
+            <a:p>
+              <a:r>
+                <a:rPr lang="en-US"/>
+                <a:t>tape</a:t>
+              </a:r>
+            </a:p>
+          </p:txBody>
+        </p:sp>
+      </p:grpSp>
+      <p:grpSp>
+        <p:nvGrpSpPr>
+          <p:cNvPr id="13" name="Group 12">
+            <a:extLst>
+              <a:ext uri="{FF2B5EF4-FFF2-40B4-BE49-F238E27FC236}">
+                <a16:creationId xmlns:a16="http://schemas.microsoft.com/office/drawing/2014/main" id="{35669CFB-69BA-B83C-5955-A99CF63001A2}"/>
+              </a:ext>
+            </a:extLst>
+          </p:cNvPr>
+          <p:cNvGrpSpPr/>
+          <p:nvPr/>
+        </p:nvGrpSpPr>
+        <p:grpSpPr>
+          <a:xfrm>
+            <a:off x="9446599" y="2540405"/>
+            <a:ext cx="1161344" cy="1099066"/>
+            <a:chOff x="2170185" y="4087564"/>
+            <a:chExt cx="1161344" cy="1099066"/>
+          </a:xfrm>
+        </p:grpSpPr>
+        <p:sp>
+          <p:nvSpPr>
+            <p:cNvPr id="14" name="TextBox 13">
+              <a:extLst>
+                <a:ext uri="{FF2B5EF4-FFF2-40B4-BE49-F238E27FC236}">
+                  <a16:creationId xmlns:a16="http://schemas.microsoft.com/office/drawing/2014/main" id="{86013919-6BFD-BA1B-531E-70FCA26B8CFE}"/>
+                </a:ext>
+              </a:extLst>
+            </p:cNvPr>
+            <p:cNvSpPr txBox="1"/>
+            <p:nvPr/>
+          </p:nvSpPr>
+          <p:spPr>
+            <a:xfrm>
+              <a:off x="2170185" y="4817298"/>
+              <a:ext cx="1161344" cy="369332"/>
+            </a:xfrm>
+            <a:prstGeom prst="rect">
+              <a:avLst/>
+            </a:prstGeom>
+            <a:noFill/>
+          </p:spPr>
+          <p:txBody>
+            <a:bodyPr wrap="none" rtlCol="0">
+              <a:spAutoFit/>
+            </a:bodyPr>
+            <a:lstStyle/>
+            <a:p>
+              <a:r>
+                <a:rPr lang="en-US"/>
+                <a:t>computer</a:t>
+              </a:r>
+            </a:p>
+          </p:txBody>
+        </p:sp>
+        <p:pic>
+          <p:nvPicPr>
+            <p:cNvPr id="15" name="Graphic 14" descr="Computer with solid fill">
+              <a:extLst>
+                <a:ext uri="{FF2B5EF4-FFF2-40B4-BE49-F238E27FC236}">
+                  <a16:creationId xmlns:a16="http://schemas.microsoft.com/office/drawing/2014/main" id="{FE54A989-2760-86A3-D1F0-99FDF6B69DFF}"/>
+                </a:ext>
+              </a:extLst>
+            </p:cNvPr>
+            <p:cNvPicPr>
+              <a:picLocks noChangeAspect="1"/>
+            </p:cNvPicPr>
+            <p:nvPr/>
+          </p:nvPicPr>
+          <p:blipFill>
+            <a:blip r:embed="rId8">
+              <a:extLst>
+                <a:ext uri="{96DAC541-7B7A-43D3-8B79-37D633B846F1}">
+                  <asvg:svgBlip xmlns:asvg="http://schemas.microsoft.com/office/drawing/2016/SVG/main" r:embed="rId9"/>
+                </a:ext>
+              </a:extLst>
+            </a:blip>
+            <a:stretch>
+              <a:fillRect/>
+            </a:stretch>
+          </p:blipFill>
+          <p:spPr>
+            <a:xfrm>
+              <a:off x="2293657" y="4087564"/>
+              <a:ext cx="914400" cy="914400"/>
+            </a:xfrm>
+            <a:prstGeom prst="rect">
+              <a:avLst/>
+            </a:prstGeom>
+          </p:spPr>
+        </p:pic>
+      </p:grpSp>
+      <p:cxnSp>
+        <p:nvCxnSpPr>
+          <p:cNvPr id="16" name="Straight Arrow Connector 15">
+            <a:extLst>
+              <a:ext uri="{FF2B5EF4-FFF2-40B4-BE49-F238E27FC236}">
+                <a16:creationId xmlns:a16="http://schemas.microsoft.com/office/drawing/2014/main" id="{E2BADA03-A92D-372F-3E61-BA968321DD4F}"/>
+              </a:ext>
+            </a:extLst>
+          </p:cNvPr>
+          <p:cNvCxnSpPr>
+            <a:cxnSpLocks/>
+            <a:stCxn id="5" idx="3"/>
+          </p:cNvCxnSpPr>
+          <p:nvPr/>
+        </p:nvCxnSpPr>
+        <p:spPr>
+          <a:xfrm flipV="1">
+            <a:off x="8210333" y="997827"/>
+            <a:ext cx="902538" cy="1266"/>
+          </a:xfrm>
+          <a:prstGeom prst="straightConnector1">
+            <a:avLst/>
+          </a:prstGeom>
+          <a:ln w="38100">
+            <a:headEnd type="triangle"/>
+            <a:tailEnd type="triangle"/>
+          </a:ln>
+        </p:spPr>
+        <p:style>
+          <a:lnRef idx="2">
+            <a:schemeClr val="dk1"/>
+          </a:lnRef>
+          <a:fillRef idx="0">
+            <a:schemeClr val="dk1"/>
+          </a:fillRef>
+          <a:effectRef idx="1">
+            <a:schemeClr val="dk1"/>
+          </a:effectRef>
+          <a:fontRef idx="minor">
+            <a:schemeClr val="tx1"/>
+          </a:fontRef>
+        </p:style>
+      </p:cxnSp>
+      <p:cxnSp>
+        <p:nvCxnSpPr>
+          <p:cNvPr id="17" name="Straight Arrow Connector 16">
+            <a:extLst>
+              <a:ext uri="{FF2B5EF4-FFF2-40B4-BE49-F238E27FC236}">
+                <a16:creationId xmlns:a16="http://schemas.microsoft.com/office/drawing/2014/main" id="{A8C39A4D-F99F-ED0D-AD42-414BEADEC3A0}"/>
+              </a:ext>
+            </a:extLst>
+          </p:cNvPr>
+          <p:cNvCxnSpPr>
+            <a:cxnSpLocks/>
+            <a:endCxn id="11" idx="1"/>
+          </p:cNvCxnSpPr>
+          <p:nvPr/>
+        </p:nvCxnSpPr>
+        <p:spPr>
+          <a:xfrm>
+            <a:off x="10027271" y="975415"/>
+            <a:ext cx="856068" cy="23678"/>
+          </a:xfrm>
+          <a:prstGeom prst="straightConnector1">
+            <a:avLst/>
+          </a:prstGeom>
+          <a:ln w="38100">
+            <a:headEnd type="triangle"/>
+            <a:tailEnd type="triangle"/>
+          </a:ln>
+        </p:spPr>
+        <p:style>
+          <a:lnRef idx="2">
+            <a:schemeClr val="dk1"/>
+          </a:lnRef>
+          <a:fillRef idx="0">
+            <a:schemeClr val="dk1"/>
+          </a:fillRef>
+          <a:effectRef idx="1">
+            <a:schemeClr val="dk1"/>
+          </a:effectRef>
+          <a:fontRef idx="minor">
+            <a:schemeClr val="tx1"/>
+          </a:fontRef>
+        </p:style>
+      </p:cxnSp>
+      <p:cxnSp>
+        <p:nvCxnSpPr>
+          <p:cNvPr id="18" name="Straight Arrow Connector 17">
+            <a:extLst>
+              <a:ext uri="{FF2B5EF4-FFF2-40B4-BE49-F238E27FC236}">
+                <a16:creationId xmlns:a16="http://schemas.microsoft.com/office/drawing/2014/main" id="{72069ADC-ED35-A0D1-1C40-4FE21234B75B}"/>
+              </a:ext>
+            </a:extLst>
+          </p:cNvPr>
+          <p:cNvCxnSpPr>
+            <a:cxnSpLocks/>
+            <a:endCxn id="9" idx="2"/>
+          </p:cNvCxnSpPr>
+          <p:nvPr/>
+        </p:nvCxnSpPr>
+        <p:spPr>
+          <a:xfrm flipH="1" flipV="1">
+            <a:off x="9886921" y="2102624"/>
+            <a:ext cx="140350" cy="460193"/>
+          </a:xfrm>
+          <a:prstGeom prst="straightConnector1">
+            <a:avLst/>
+          </a:prstGeom>
+          <a:ln w="38100">
+            <a:headEnd type="triangle"/>
+            <a:tailEnd type="triangle"/>
+          </a:ln>
+        </p:spPr>
+        <p:style>
+          <a:lnRef idx="2">
+            <a:schemeClr val="dk1"/>
+          </a:lnRef>
+          <a:fillRef idx="0">
+            <a:schemeClr val="dk1"/>
+          </a:fillRef>
+          <a:effectRef idx="1">
+            <a:schemeClr val="dk1"/>
+          </a:effectRef>
+          <a:fontRef idx="minor">
+            <a:schemeClr val="tx1"/>
+          </a:fontRef>
+        </p:style>
+      </p:cxnSp>
+      <p:cxnSp>
+        <p:nvCxnSpPr>
+          <p:cNvPr id="19" name="Straight Arrow Connector 18">
+            <a:extLst>
+              <a:ext uri="{FF2B5EF4-FFF2-40B4-BE49-F238E27FC236}">
+                <a16:creationId xmlns:a16="http://schemas.microsoft.com/office/drawing/2014/main" id="{E138F010-9566-421C-63A2-812E2A498B9B}"/>
+              </a:ext>
+            </a:extLst>
+          </p:cNvPr>
+          <p:cNvCxnSpPr>
+            <a:cxnSpLocks/>
+            <a:stCxn id="15" idx="1"/>
+            <a:endCxn id="6" idx="2"/>
+          </p:cNvCxnSpPr>
+          <p:nvPr/>
+        </p:nvCxnSpPr>
+        <p:spPr>
+          <a:xfrm flipH="1" flipV="1">
+            <a:off x="7753133" y="1825625"/>
+            <a:ext cx="1816938" cy="1171980"/>
+          </a:xfrm>
+          <a:prstGeom prst="straightConnector1">
+            <a:avLst/>
+          </a:prstGeom>
+          <a:ln w="38100">
+            <a:headEnd type="triangle"/>
+            <a:tailEnd type="triangle"/>
+          </a:ln>
+        </p:spPr>
+        <p:style>
+          <a:lnRef idx="2">
+            <a:schemeClr val="dk1"/>
+          </a:lnRef>
+          <a:fillRef idx="0">
+            <a:schemeClr val="dk1"/>
+          </a:fillRef>
+          <a:effectRef idx="1">
+            <a:schemeClr val="dk1"/>
+          </a:effectRef>
+          <a:fontRef idx="minor">
+            <a:schemeClr val="tx1"/>
+          </a:fontRef>
+        </p:style>
+      </p:cxnSp>
+    </p:spTree>
+    <p:extLst>
+      <p:ext uri="{BB962C8B-B14F-4D97-AF65-F5344CB8AC3E}">
         <p14:creationId xmlns:p14="http://schemas.microsoft.com/office/powerpoint/2010/main" val="3439045736"/>
+      </p:ext>
+    </p:extLst>
+  </p:cSld>
+  <p:clrMapOvr>
+    <a:masterClrMapping/>
+  </p:clrMapOvr>
+</p:sld>
+</file>
+
+<file path=ppt/slides/slide16.xml><?xml version="1.0" encoding="utf-8"?>
+<p:sld xmlns:a="http://schemas.openxmlformats.org/drawingml/2006/main" xmlns:r="http://schemas.openxmlformats.org/officeDocument/2006/relationships" xmlns:p="http://schemas.openxmlformats.org/presentationml/2006/main">
+  <p:cSld>
+    <p:spTree>
+      <p:nvGrpSpPr>
+        <p:cNvPr id="1" name=""/>
+        <p:cNvGrpSpPr/>
+        <p:nvPr/>
+      </p:nvGrpSpPr>
+      <p:grpSpPr>
+        <a:xfrm>
+          <a:off x="0" y="0"/>
+          <a:ext cx="0" cy="0"/>
+          <a:chOff x="0" y="0"/>
+          <a:chExt cx="0" cy="0"/>
+        </a:xfrm>
+      </p:grpSpPr>
+      <p:sp>
+        <p:nvSpPr>
+          <p:cNvPr id="2" name="Title 1">
+            <a:extLst>
+              <a:ext uri="{FF2B5EF4-FFF2-40B4-BE49-F238E27FC236}">
+                <a16:creationId xmlns:a16="http://schemas.microsoft.com/office/drawing/2014/main" id="{91AE2DC6-8F58-77B7-B438-CEF3873A329A}"/>
+              </a:ext>
+            </a:extLst>
+          </p:cNvPr>
+          <p:cNvSpPr>
+            <a:spLocks noGrp="1"/>
+          </p:cNvSpPr>
+          <p:nvPr>
+            <p:ph type="title"/>
+          </p:nvPr>
+        </p:nvSpPr>
+        <p:spPr/>
+        <p:txBody>
+          <a:bodyPr/>
+          <a:lstStyle/>
+          <a:p>
+            <a:r>
+              <a:rPr lang="en-US"/>
+              <a:t>Rclone</a:t>
+            </a:r>
+          </a:p>
+        </p:txBody>
+      </p:sp>
+      <p:sp>
+        <p:nvSpPr>
+          <p:cNvPr id="3" name="Content Placeholder 2">
+            <a:extLst>
+              <a:ext uri="{FF2B5EF4-FFF2-40B4-BE49-F238E27FC236}">
+                <a16:creationId xmlns:a16="http://schemas.microsoft.com/office/drawing/2014/main" id="{C8337957-9563-935C-119F-4493F389EB3D}"/>
+              </a:ext>
+            </a:extLst>
+          </p:cNvPr>
+          <p:cNvSpPr>
+            <a:spLocks noGrp="1"/>
+          </p:cNvSpPr>
+          <p:nvPr>
+            <p:ph idx="1"/>
+          </p:nvPr>
+        </p:nvSpPr>
+        <p:spPr/>
+        <p:txBody>
+          <a:bodyPr/>
+          <a:lstStyle/>
+          <a:p>
+            <a:r>
+              <a:rPr lang="en-US"/>
+              <a:t>You can use rclone to move/sync files between FASRC and Google Drive</a:t>
+            </a:r>
+          </a:p>
+          <a:p>
+            <a:r>
+              <a:rPr lang="en-US"/>
+              <a:t>Command line only</a:t>
+            </a:r>
+          </a:p>
+          <a:p>
+            <a:r>
+              <a:rPr lang="en-US"/>
+              <a:t>Not great for many small files (2 files per second limit)</a:t>
+            </a:r>
+          </a:p>
+          <a:p>
+            <a:r>
+              <a:rPr lang="en-US"/>
+              <a:t>FASRC Docs</a:t>
+            </a:r>
+          </a:p>
+          <a:p>
+            <a:pPr lvl="1"/>
+            <a:r>
+              <a:rPr lang="en-US"/>
+              <a:t>https://docs.rc.fas.harvard.edu/kb/rclone/</a:t>
+            </a:r>
+          </a:p>
+          <a:p>
+            <a:r>
+              <a:rPr lang="en-US"/>
+              <a:t>Walkthrough to connect to your google drive</a:t>
+            </a:r>
+          </a:p>
+          <a:p>
+            <a:pPr lvl="1"/>
+            <a:r>
+              <a:rPr lang="en-US"/>
+              <a:t>https://rclone.org/drive/</a:t>
+            </a:r>
+          </a:p>
+        </p:txBody>
+      </p:sp>
+      <p:grpSp>
+        <p:nvGrpSpPr>
+          <p:cNvPr id="4" name="Group 3">
+            <a:extLst>
+              <a:ext uri="{FF2B5EF4-FFF2-40B4-BE49-F238E27FC236}">
+                <a16:creationId xmlns:a16="http://schemas.microsoft.com/office/drawing/2014/main" id="{41249D89-F7A3-4C8C-D7FB-2F462AF65A07}"/>
+              </a:ext>
+            </a:extLst>
+          </p:cNvPr>
+          <p:cNvGrpSpPr/>
+          <p:nvPr/>
+        </p:nvGrpSpPr>
+        <p:grpSpPr>
+          <a:xfrm>
+            <a:off x="5786551" y="265763"/>
+            <a:ext cx="1101648" cy="1283732"/>
+            <a:chOff x="5643892" y="387638"/>
+            <a:chExt cx="1101648" cy="1283732"/>
+          </a:xfrm>
+        </p:grpSpPr>
+        <p:pic>
+          <p:nvPicPr>
+            <p:cNvPr id="5" name="Graphic 4" descr="Server with solid fill">
+              <a:extLst>
+                <a:ext uri="{FF2B5EF4-FFF2-40B4-BE49-F238E27FC236}">
+                  <a16:creationId xmlns:a16="http://schemas.microsoft.com/office/drawing/2014/main" id="{FD68547D-3122-D0C4-68D7-23F92E8C3165}"/>
+                </a:ext>
+              </a:extLst>
+            </p:cNvPr>
+            <p:cNvPicPr>
+              <a:picLocks noChangeAspect="1"/>
+            </p:cNvPicPr>
+            <p:nvPr/>
+          </p:nvPicPr>
+          <p:blipFill>
+            <a:blip r:embed="rId2">
+              <a:extLst>
+                <a:ext uri="{96DAC541-7B7A-43D3-8B79-37D633B846F1}">
+                  <asvg:svgBlip xmlns:asvg="http://schemas.microsoft.com/office/drawing/2016/SVG/main" r:embed="rId3"/>
+                </a:ext>
+              </a:extLst>
+            </a:blip>
+            <a:stretch>
+              <a:fillRect/>
+            </a:stretch>
+          </p:blipFill>
+          <p:spPr>
+            <a:xfrm>
+              <a:off x="5737516" y="387638"/>
+              <a:ext cx="914400" cy="914400"/>
+            </a:xfrm>
+            <a:prstGeom prst="rect">
+              <a:avLst/>
+            </a:prstGeom>
+          </p:spPr>
+        </p:pic>
+        <p:sp>
+          <p:nvSpPr>
+            <p:cNvPr id="6" name="TextBox 5">
+              <a:extLst>
+                <a:ext uri="{FF2B5EF4-FFF2-40B4-BE49-F238E27FC236}">
+                  <a16:creationId xmlns:a16="http://schemas.microsoft.com/office/drawing/2014/main" id="{78A9332B-BF49-E644-060B-BBF4C53627D1}"/>
+                </a:ext>
+              </a:extLst>
+            </p:cNvPr>
+            <p:cNvSpPr txBox="1"/>
+            <p:nvPr/>
+          </p:nvSpPr>
+          <p:spPr>
+            <a:xfrm>
+              <a:off x="5643892" y="1302038"/>
+              <a:ext cx="1101648" cy="369332"/>
+            </a:xfrm>
+            <a:prstGeom prst="rect">
+              <a:avLst/>
+            </a:prstGeom>
+            <a:noFill/>
+          </p:spPr>
+          <p:txBody>
+            <a:bodyPr wrap="none" rtlCol="0">
+              <a:spAutoFit/>
+            </a:bodyPr>
+            <a:lstStyle/>
+            <a:p>
+              <a:r>
+                <a:rPr lang="en-US"/>
+                <a:t>lab share</a:t>
+              </a:r>
+            </a:p>
+          </p:txBody>
+        </p:sp>
+      </p:grpSp>
+      <p:grpSp>
+        <p:nvGrpSpPr>
+          <p:cNvPr id="7" name="Group 6">
+            <a:extLst>
+              <a:ext uri="{FF2B5EF4-FFF2-40B4-BE49-F238E27FC236}">
+                <a16:creationId xmlns:a16="http://schemas.microsoft.com/office/drawing/2014/main" id="{57CE38CE-7397-5843-9A0C-58FC659522CF}"/>
+              </a:ext>
+            </a:extLst>
+          </p:cNvPr>
+          <p:cNvGrpSpPr/>
+          <p:nvPr/>
+        </p:nvGrpSpPr>
+        <p:grpSpPr>
+          <a:xfrm>
+            <a:off x="8159348" y="365125"/>
+            <a:ext cx="780278" cy="1039070"/>
+            <a:chOff x="9898343" y="3203218"/>
+            <a:chExt cx="780278" cy="1039070"/>
+          </a:xfrm>
+        </p:grpSpPr>
+        <p:pic>
+          <p:nvPicPr>
+            <p:cNvPr id="8" name="Picture 2">
+              <a:hlinkClick r:id="rId4"/>
+              <a:extLst>
+                <a:ext uri="{FF2B5EF4-FFF2-40B4-BE49-F238E27FC236}">
+                  <a16:creationId xmlns:a16="http://schemas.microsoft.com/office/drawing/2014/main" id="{444010F7-C350-3D51-35A2-27DA85398EED}"/>
+                </a:ext>
+              </a:extLst>
+            </p:cNvPr>
+            <p:cNvPicPr>
+              <a:picLocks noChangeAspect="1" noChangeArrowheads="1"/>
+            </p:cNvPicPr>
+            <p:nvPr/>
+          </p:nvPicPr>
+          <p:blipFill>
+            <a:blip r:embed="rId5">
+              <a:extLst>
+                <a:ext uri="{28A0092B-C50C-407E-A947-70E740481C1C}">
+                  <a14:useLocalDpi xmlns:a14="http://schemas.microsoft.com/office/drawing/2010/main" val="0"/>
+                </a:ext>
+              </a:extLst>
+            </a:blip>
+            <a:srcRect/>
+            <a:stretch>
+              <a:fillRect/>
+            </a:stretch>
+          </p:blipFill>
+          <p:spPr bwMode="auto">
+            <a:xfrm>
+              <a:off x="9898343" y="3203218"/>
+              <a:ext cx="750341" cy="669738"/>
+            </a:xfrm>
+            <a:prstGeom prst="rect">
+              <a:avLst/>
+            </a:prstGeom>
+            <a:noFill/>
+            <a:extLst>
+              <a:ext uri="{909E8E84-426E-40DD-AFC4-6F175D3DCCD1}">
+                <a14:hiddenFill xmlns:a14="http://schemas.microsoft.com/office/drawing/2010/main">
+                  <a:solidFill>
+                    <a:srgbClr val="FFFFFF"/>
+                  </a:solidFill>
+                </a14:hiddenFill>
+              </a:ext>
+            </a:extLst>
+          </p:spPr>
+        </p:pic>
+        <p:sp>
+          <p:nvSpPr>
+            <p:cNvPr id="9" name="TextBox 8">
+              <a:extLst>
+                <a:ext uri="{FF2B5EF4-FFF2-40B4-BE49-F238E27FC236}">
+                  <a16:creationId xmlns:a16="http://schemas.microsoft.com/office/drawing/2014/main" id="{56CBF775-CF6E-FBA8-BD75-F62192797396}"/>
+                </a:ext>
+              </a:extLst>
+            </p:cNvPr>
+            <p:cNvSpPr txBox="1"/>
+            <p:nvPr/>
+          </p:nvSpPr>
+          <p:spPr>
+            <a:xfrm>
+              <a:off x="9898343" y="3872956"/>
+              <a:ext cx="780278" cy="369332"/>
+            </a:xfrm>
+            <a:prstGeom prst="rect">
+              <a:avLst/>
+            </a:prstGeom>
+            <a:noFill/>
+          </p:spPr>
+          <p:txBody>
+            <a:bodyPr wrap="none" rtlCol="0">
+              <a:spAutoFit/>
+            </a:bodyPr>
+            <a:lstStyle/>
+            <a:p>
+              <a:r>
+                <a:rPr lang="en-US"/>
+                <a:t>gdrive</a:t>
+              </a:r>
+            </a:p>
+          </p:txBody>
+        </p:sp>
+      </p:grpSp>
+      <p:cxnSp>
+        <p:nvCxnSpPr>
+          <p:cNvPr id="10" name="Straight Arrow Connector 9">
+            <a:extLst>
+              <a:ext uri="{FF2B5EF4-FFF2-40B4-BE49-F238E27FC236}">
+                <a16:creationId xmlns:a16="http://schemas.microsoft.com/office/drawing/2014/main" id="{110B6D67-1C37-606D-E1BF-DDF74D9A8206}"/>
+              </a:ext>
+            </a:extLst>
+          </p:cNvPr>
+          <p:cNvCxnSpPr>
+            <a:cxnSpLocks/>
+            <a:stCxn id="5" idx="3"/>
+            <a:endCxn id="8" idx="1"/>
+          </p:cNvCxnSpPr>
+          <p:nvPr/>
+        </p:nvCxnSpPr>
+        <p:spPr>
+          <a:xfrm flipV="1">
+            <a:off x="6794575" y="699994"/>
+            <a:ext cx="1364773" cy="22969"/>
+          </a:xfrm>
+          <a:prstGeom prst="straightConnector1">
+            <a:avLst/>
+          </a:prstGeom>
+          <a:ln w="38100">
+            <a:headEnd type="triangle"/>
+            <a:tailEnd type="triangle"/>
+          </a:ln>
+        </p:spPr>
+        <p:style>
+          <a:lnRef idx="2">
+            <a:schemeClr val="dk1"/>
+          </a:lnRef>
+          <a:fillRef idx="0">
+            <a:schemeClr val="dk1"/>
+          </a:fillRef>
+          <a:effectRef idx="1">
+            <a:schemeClr val="dk1"/>
+          </a:effectRef>
+          <a:fontRef idx="minor">
+            <a:schemeClr val="tx1"/>
+          </a:fontRef>
+        </p:style>
+      </p:cxnSp>
+      <p:grpSp>
+        <p:nvGrpSpPr>
+          <p:cNvPr id="12" name="Group 11">
+            <a:extLst>
+              <a:ext uri="{FF2B5EF4-FFF2-40B4-BE49-F238E27FC236}">
+                <a16:creationId xmlns:a16="http://schemas.microsoft.com/office/drawing/2014/main" id="{32529AA6-CE93-59DF-F69F-F74194AB3746}"/>
+              </a:ext>
+            </a:extLst>
+          </p:cNvPr>
+          <p:cNvGrpSpPr/>
+          <p:nvPr/>
+        </p:nvGrpSpPr>
+        <p:grpSpPr>
+          <a:xfrm>
+            <a:off x="10038354" y="265763"/>
+            <a:ext cx="1255728" cy="1283732"/>
+            <a:chOff x="3032551" y="387638"/>
+            <a:chExt cx="1255728" cy="1283732"/>
+          </a:xfrm>
+        </p:grpSpPr>
+        <p:pic>
+          <p:nvPicPr>
+            <p:cNvPr id="13" name="Graphic 12" descr="Server with solid fill">
+              <a:extLst>
+                <a:ext uri="{FF2B5EF4-FFF2-40B4-BE49-F238E27FC236}">
+                  <a16:creationId xmlns:a16="http://schemas.microsoft.com/office/drawing/2014/main" id="{B370B1A7-C295-E65E-364F-E35A2CEAB24C}"/>
+                </a:ext>
+              </a:extLst>
+            </p:cNvPr>
+            <p:cNvPicPr>
+              <a:picLocks noChangeAspect="1"/>
+            </p:cNvPicPr>
+            <p:nvPr/>
+          </p:nvPicPr>
+          <p:blipFill>
+            <a:blip r:embed="rId6">
+              <a:extLst>
+                <a:ext uri="{96DAC541-7B7A-43D3-8B79-37D633B846F1}">
+                  <asvg:svgBlip xmlns:asvg="http://schemas.microsoft.com/office/drawing/2016/SVG/main" r:embed="rId7"/>
+                </a:ext>
+              </a:extLst>
+            </a:blip>
+            <a:stretch>
+              <a:fillRect/>
+            </a:stretch>
+          </p:blipFill>
+          <p:spPr>
+            <a:xfrm>
+              <a:off x="3203215" y="387638"/>
+              <a:ext cx="914400" cy="914400"/>
+            </a:xfrm>
+            <a:prstGeom prst="rect">
+              <a:avLst/>
+            </a:prstGeom>
+          </p:spPr>
+        </p:pic>
+        <p:sp>
+          <p:nvSpPr>
+            <p:cNvPr id="14" name="TextBox 13">
+              <a:extLst>
+                <a:ext uri="{FF2B5EF4-FFF2-40B4-BE49-F238E27FC236}">
+                  <a16:creationId xmlns:a16="http://schemas.microsoft.com/office/drawing/2014/main" id="{598BB53B-CC27-03F5-E7A6-B8920B8EBE1A}"/>
+                </a:ext>
+              </a:extLst>
+            </p:cNvPr>
+            <p:cNvSpPr txBox="1"/>
+            <p:nvPr/>
+          </p:nvSpPr>
+          <p:spPr>
+            <a:xfrm>
+              <a:off x="3032551" y="1302038"/>
+              <a:ext cx="1255728" cy="369332"/>
+            </a:xfrm>
+            <a:prstGeom prst="rect">
+              <a:avLst/>
+            </a:prstGeom>
+            <a:noFill/>
+          </p:spPr>
+          <p:txBody>
+            <a:bodyPr wrap="none" rtlCol="0">
+              <a:spAutoFit/>
+            </a:bodyPr>
+            <a:lstStyle/>
+            <a:p>
+              <a:r>
+                <a:rPr lang="en-US"/>
+                <a:t>netscratch</a:t>
+              </a:r>
+            </a:p>
+          </p:txBody>
+        </p:sp>
+      </p:grpSp>
+      <p:cxnSp>
+        <p:nvCxnSpPr>
+          <p:cNvPr id="15" name="Straight Arrow Connector 14">
+            <a:extLst>
+              <a:ext uri="{FF2B5EF4-FFF2-40B4-BE49-F238E27FC236}">
+                <a16:creationId xmlns:a16="http://schemas.microsoft.com/office/drawing/2014/main" id="{0BE1CBEF-D1F5-6A2A-7B57-0C0A9727D41F}"/>
+              </a:ext>
+            </a:extLst>
+          </p:cNvPr>
+          <p:cNvCxnSpPr>
+            <a:cxnSpLocks/>
+          </p:cNvCxnSpPr>
+          <p:nvPr/>
+        </p:nvCxnSpPr>
+        <p:spPr>
+          <a:xfrm>
+            <a:off x="8956878" y="773767"/>
+            <a:ext cx="1222203" cy="0"/>
+          </a:xfrm>
+          <a:prstGeom prst="straightConnector1">
+            <a:avLst/>
+          </a:prstGeom>
+          <a:ln w="38100">
+            <a:headEnd type="triangle"/>
+            <a:tailEnd type="triangle"/>
+          </a:ln>
+        </p:spPr>
+        <p:style>
+          <a:lnRef idx="2">
+            <a:schemeClr val="dk1"/>
+          </a:lnRef>
+          <a:fillRef idx="0">
+            <a:schemeClr val="dk1"/>
+          </a:fillRef>
+          <a:effectRef idx="1">
+            <a:schemeClr val="dk1"/>
+          </a:effectRef>
+          <a:fontRef idx="minor">
+            <a:schemeClr val="tx1"/>
+          </a:fontRef>
+        </p:style>
+      </p:cxnSp>
+    </p:spTree>
+    <p:extLst>
+      <p:ext uri="{BB962C8B-B14F-4D97-AF65-F5344CB8AC3E}">
+        <p14:creationId xmlns:p14="http://schemas.microsoft.com/office/powerpoint/2010/main" val="440710811"/>
       </p:ext>
     </p:extLst>
   </p:cSld>
@@ -6546,6 +8028,1245 @@
 </file>
 
 <file path=ppt/slides/slide4.xml><?xml version="1.0" encoding="utf-8"?>
+<p:sld xmlns:a="http://schemas.openxmlformats.org/drawingml/2006/main" xmlns:r="http://schemas.openxmlformats.org/officeDocument/2006/relationships" xmlns:p="http://schemas.openxmlformats.org/presentationml/2006/main">
+  <p:cSld>
+    <p:spTree>
+      <p:nvGrpSpPr>
+        <p:cNvPr id="1" name=""/>
+        <p:cNvGrpSpPr/>
+        <p:nvPr/>
+      </p:nvGrpSpPr>
+      <p:grpSpPr>
+        <a:xfrm>
+          <a:off x="0" y="0"/>
+          <a:ext cx="0" cy="0"/>
+          <a:chOff x="0" y="0"/>
+          <a:chExt cx="0" cy="0"/>
+        </a:xfrm>
+      </p:grpSpPr>
+      <p:sp>
+        <p:nvSpPr>
+          <p:cNvPr id="2" name="Title 1">
+            <a:extLst>
+              <a:ext uri="{FF2B5EF4-FFF2-40B4-BE49-F238E27FC236}">
+                <a16:creationId xmlns:a16="http://schemas.microsoft.com/office/drawing/2014/main" id="{FC901837-9F51-0DDB-C3C7-86BE03B9D8EF}"/>
+              </a:ext>
+            </a:extLst>
+          </p:cNvPr>
+          <p:cNvSpPr>
+            <a:spLocks noGrp="1"/>
+          </p:cNvSpPr>
+          <p:nvPr>
+            <p:ph type="title"/>
+          </p:nvPr>
+        </p:nvSpPr>
+        <p:spPr/>
+        <p:txBody>
+          <a:bodyPr/>
+          <a:lstStyle/>
+          <a:p>
+            <a:r>
+              <a:rPr lang="en-US"/>
+              <a:t>Cluster file system review - permissions</a:t>
+            </a:r>
+          </a:p>
+        </p:txBody>
+      </p:sp>
+      <p:sp>
+        <p:nvSpPr>
+          <p:cNvPr id="3" name="Content Placeholder 2">
+            <a:extLst>
+              <a:ext uri="{FF2B5EF4-FFF2-40B4-BE49-F238E27FC236}">
+                <a16:creationId xmlns:a16="http://schemas.microsoft.com/office/drawing/2014/main" id="{DF147311-25E2-5ABB-3AC2-72B6FC6F4FDC}"/>
+              </a:ext>
+            </a:extLst>
+          </p:cNvPr>
+          <p:cNvSpPr>
+            <a:spLocks noGrp="1"/>
+          </p:cNvSpPr>
+          <p:nvPr>
+            <p:ph idx="1"/>
+          </p:nvPr>
+        </p:nvSpPr>
+        <p:spPr>
+          <a:xfrm>
+            <a:off x="6347012" y="1411942"/>
+            <a:ext cx="5006788" cy="5217458"/>
+          </a:xfrm>
+        </p:spPr>
+        <p:txBody>
+          <a:bodyPr>
+            <a:normAutofit lnSpcReduction="10000"/>
+          </a:bodyPr>
+          <a:lstStyle/>
+          <a:p>
+            <a:r>
+              <a:rPr lang="en-US"/>
+              <a:t>Lab</a:t>
+            </a:r>
+          </a:p>
+          <a:p>
+            <a:pPr lvl="1"/>
+            <a:r>
+              <a:rPr lang="en-US"/>
+              <a:t>Only people in your lab can read or write to this folder</a:t>
+            </a:r>
+          </a:p>
+          <a:p>
+            <a:r>
+              <a:rPr lang="en-US"/>
+              <a:t>Everyone</a:t>
+            </a:r>
+          </a:p>
+          <a:p>
+            <a:pPr lvl="1"/>
+            <a:r>
+              <a:rPr lang="en-US"/>
+              <a:t>Everyone on the cluster can read/write to this folder</a:t>
+            </a:r>
+          </a:p>
+          <a:p>
+            <a:r>
+              <a:rPr lang="en-US"/>
+              <a:t>User</a:t>
+            </a:r>
+          </a:p>
+          <a:p>
+            <a:pPr lvl="1"/>
+            <a:r>
+              <a:rPr lang="en-US"/>
+              <a:t>Only specific users can read/write here</a:t>
+            </a:r>
+          </a:p>
+          <a:p>
+            <a:pPr lvl="1"/>
+            <a:r>
+              <a:rPr lang="en-US"/>
+              <a:t>Deprecated, don’t use!</a:t>
+            </a:r>
+          </a:p>
+          <a:p>
+            <a:r>
+              <a:rPr lang="en-US"/>
+              <a:t>In general, you can’t modify/delete/move files created by someone else</a:t>
+            </a:r>
+          </a:p>
+        </p:txBody>
+      </p:sp>
+      <p:pic>
+        <p:nvPicPr>
+          <p:cNvPr id="15" name="Picture 4" descr="Beige Folder Icon for Mac | Customizable and High-Quality">
+            <a:extLst>
+              <a:ext uri="{FF2B5EF4-FFF2-40B4-BE49-F238E27FC236}">
+                <a16:creationId xmlns:a16="http://schemas.microsoft.com/office/drawing/2014/main" id="{3477DEA3-3738-928C-9AD7-F93AD3F6EAB1}"/>
+              </a:ext>
+            </a:extLst>
+          </p:cNvPr>
+          <p:cNvPicPr>
+            <a:picLocks noChangeAspect="1" noChangeArrowheads="1"/>
+          </p:cNvPicPr>
+          <p:nvPr/>
+        </p:nvPicPr>
+        <p:blipFill>
+          <a:blip r:embed="rId2">
+            <a:extLst>
+              <a:ext uri="{28A0092B-C50C-407E-A947-70E740481C1C}">
+                <a14:useLocalDpi xmlns:a14="http://schemas.microsoft.com/office/drawing/2010/main" val="0"/>
+              </a:ext>
+            </a:extLst>
+          </a:blip>
+          <a:srcRect/>
+          <a:stretch>
+            <a:fillRect/>
+          </a:stretch>
+        </p:blipFill>
+        <p:spPr bwMode="auto">
+          <a:xfrm>
+            <a:off x="1710524" y="1566418"/>
+            <a:ext cx="1143387" cy="1143387"/>
+          </a:xfrm>
+          <a:prstGeom prst="rect">
+            <a:avLst/>
+          </a:prstGeom>
+          <a:noFill/>
+          <a:extLst>
+            <a:ext uri="{909E8E84-426E-40DD-AFC4-6F175D3DCCD1}">
+              <a14:hiddenFill xmlns:a14="http://schemas.microsoft.com/office/drawing/2010/main">
+                <a:solidFill>
+                  <a:srgbClr val="FFFFFF"/>
+                </a:solidFill>
+              </a14:hiddenFill>
+            </a:ext>
+          </a:extLst>
+        </p:spPr>
+      </p:pic>
+      <p:sp>
+        <p:nvSpPr>
+          <p:cNvPr id="16" name="TextBox 15">
+            <a:extLst>
+              <a:ext uri="{FF2B5EF4-FFF2-40B4-BE49-F238E27FC236}">
+                <a16:creationId xmlns:a16="http://schemas.microsoft.com/office/drawing/2014/main" id="{57E8F82B-EE8E-2D6E-5690-049AB53122FD}"/>
+              </a:ext>
+            </a:extLst>
+          </p:cNvPr>
+          <p:cNvSpPr txBox="1"/>
+          <p:nvPr/>
+        </p:nvSpPr>
+        <p:spPr>
+          <a:xfrm>
+            <a:off x="1842963" y="1976333"/>
+            <a:ext cx="915421" cy="338554"/>
+          </a:xfrm>
+          <a:prstGeom prst="rect">
+            <a:avLst/>
+          </a:prstGeom>
+          <a:noFill/>
+        </p:spPr>
+        <p:txBody>
+          <a:bodyPr wrap="square" rtlCol="0">
+            <a:spAutoFit/>
+          </a:bodyPr>
+          <a:lstStyle/>
+          <a:p>
+            <a:pPr algn="ctr"/>
+            <a:r>
+              <a:rPr lang="en-US" sz="1600" dirty="0">
+                <a:latin typeface="Source Sans Pro" panose="020B0503030403020204" pitchFamily="34" charset="0"/>
+                <a:ea typeface="Source Sans Pro" panose="020B0503030403020204" pitchFamily="34" charset="0"/>
+              </a:rPr>
+              <a:t>X_lab/</a:t>
+            </a:r>
+            <a:endParaRPr lang="en-US" sz="3200" dirty="0">
+              <a:latin typeface="Source Sans Pro" panose="020B0503030403020204" pitchFamily="34" charset="0"/>
+              <a:ea typeface="Source Sans Pro" panose="020B0503030403020204" pitchFamily="34" charset="0"/>
+            </a:endParaRPr>
+          </a:p>
+        </p:txBody>
+      </p:sp>
+      <p:pic>
+        <p:nvPicPr>
+          <p:cNvPr id="17" name="Picture 4" descr="Beige Folder Icon for Mac | Customizable and High-Quality">
+            <a:extLst>
+              <a:ext uri="{FF2B5EF4-FFF2-40B4-BE49-F238E27FC236}">
+                <a16:creationId xmlns:a16="http://schemas.microsoft.com/office/drawing/2014/main" id="{D1E64BD7-6910-E452-E735-292DA9594C0A}"/>
+              </a:ext>
+            </a:extLst>
+          </p:cNvPr>
+          <p:cNvPicPr>
+            <a:picLocks noChangeAspect="1" noChangeArrowheads="1"/>
+          </p:cNvPicPr>
+          <p:nvPr/>
+        </p:nvPicPr>
+        <p:blipFill>
+          <a:blip r:embed="rId2">
+            <a:extLst>
+              <a:ext uri="{28A0092B-C50C-407E-A947-70E740481C1C}">
+                <a14:useLocalDpi xmlns:a14="http://schemas.microsoft.com/office/drawing/2010/main" val="0"/>
+              </a:ext>
+            </a:extLst>
+          </a:blip>
+          <a:srcRect/>
+          <a:stretch>
+            <a:fillRect/>
+          </a:stretch>
+        </p:blipFill>
+        <p:spPr bwMode="auto">
+          <a:xfrm>
+            <a:off x="1738054" y="3083569"/>
+            <a:ext cx="952500" cy="952500"/>
+          </a:xfrm>
+          <a:prstGeom prst="rect">
+            <a:avLst/>
+          </a:prstGeom>
+          <a:noFill/>
+          <a:extLst>
+            <a:ext uri="{909E8E84-426E-40DD-AFC4-6F175D3DCCD1}">
+              <a14:hiddenFill xmlns:a14="http://schemas.microsoft.com/office/drawing/2010/main">
+                <a:solidFill>
+                  <a:srgbClr val="FFFFFF"/>
+                </a:solidFill>
+              </a14:hiddenFill>
+            </a:ext>
+          </a:extLst>
+        </p:spPr>
+      </p:pic>
+      <p:sp>
+        <p:nvSpPr>
+          <p:cNvPr id="18" name="TextBox 17">
+            <a:extLst>
+              <a:ext uri="{FF2B5EF4-FFF2-40B4-BE49-F238E27FC236}">
+                <a16:creationId xmlns:a16="http://schemas.microsoft.com/office/drawing/2014/main" id="{23E0B2B8-885D-C0A5-646F-DC85ED02748B}"/>
+              </a:ext>
+            </a:extLst>
+          </p:cNvPr>
+          <p:cNvSpPr txBox="1"/>
+          <p:nvPr/>
+        </p:nvSpPr>
+        <p:spPr>
+          <a:xfrm>
+            <a:off x="1656273" y="3452373"/>
+            <a:ext cx="1143387" cy="338554"/>
+          </a:xfrm>
+          <a:prstGeom prst="rect">
+            <a:avLst/>
+          </a:prstGeom>
+          <a:noFill/>
+        </p:spPr>
+        <p:txBody>
+          <a:bodyPr wrap="square" rtlCol="0">
+            <a:spAutoFit/>
+          </a:bodyPr>
+          <a:lstStyle/>
+          <a:p>
+            <a:pPr algn="ctr"/>
+            <a:r>
+              <a:rPr lang="en-US" sz="1600" dirty="0">
+                <a:latin typeface="Source Sans Pro" panose="020B0503030403020204" pitchFamily="34" charset="0"/>
+                <a:ea typeface="Source Sans Pro" panose="020B0503030403020204" pitchFamily="34" charset="0"/>
+              </a:rPr>
+              <a:t>Everyone/</a:t>
+            </a:r>
+            <a:endParaRPr lang="en-US" sz="3200" dirty="0">
+              <a:latin typeface="Source Sans Pro" panose="020B0503030403020204" pitchFamily="34" charset="0"/>
+              <a:ea typeface="Source Sans Pro" panose="020B0503030403020204" pitchFamily="34" charset="0"/>
+            </a:endParaRPr>
+          </a:p>
+        </p:txBody>
+      </p:sp>
+      <p:pic>
+        <p:nvPicPr>
+          <p:cNvPr id="19" name="Picture 4" descr="Beige Folder Icon for Mac | Customizable and High-Quality">
+            <a:extLst>
+              <a:ext uri="{FF2B5EF4-FFF2-40B4-BE49-F238E27FC236}">
+                <a16:creationId xmlns:a16="http://schemas.microsoft.com/office/drawing/2014/main" id="{41DECB93-F429-4C44-1D1B-74F01FE4F680}"/>
+              </a:ext>
+            </a:extLst>
+          </p:cNvPr>
+          <p:cNvPicPr>
+            <a:picLocks noChangeAspect="1" noChangeArrowheads="1"/>
+          </p:cNvPicPr>
+          <p:nvPr/>
+        </p:nvPicPr>
+        <p:blipFill>
+          <a:blip r:embed="rId2">
+            <a:extLst>
+              <a:ext uri="{28A0092B-C50C-407E-A947-70E740481C1C}">
+                <a14:useLocalDpi xmlns:a14="http://schemas.microsoft.com/office/drawing/2010/main" val="0"/>
+              </a:ext>
+            </a:extLst>
+          </a:blip>
+          <a:srcRect/>
+          <a:stretch>
+            <a:fillRect/>
+          </a:stretch>
+        </p:blipFill>
+        <p:spPr bwMode="auto">
+          <a:xfrm>
+            <a:off x="3285174" y="3157118"/>
+            <a:ext cx="952499" cy="952499"/>
+          </a:xfrm>
+          <a:prstGeom prst="rect">
+            <a:avLst/>
+          </a:prstGeom>
+          <a:noFill/>
+          <a:extLst>
+            <a:ext uri="{909E8E84-426E-40DD-AFC4-6F175D3DCCD1}">
+              <a14:hiddenFill xmlns:a14="http://schemas.microsoft.com/office/drawing/2010/main">
+                <a:solidFill>
+                  <a:srgbClr val="FFFFFF"/>
+                </a:solidFill>
+              </a14:hiddenFill>
+            </a:ext>
+          </a:extLst>
+        </p:spPr>
+      </p:pic>
+      <p:sp>
+        <p:nvSpPr>
+          <p:cNvPr id="20" name="TextBox 19">
+            <a:extLst>
+              <a:ext uri="{FF2B5EF4-FFF2-40B4-BE49-F238E27FC236}">
+                <a16:creationId xmlns:a16="http://schemas.microsoft.com/office/drawing/2014/main" id="{05715DB2-F657-6B38-E616-8B2F22F06CFC}"/>
+              </a:ext>
+            </a:extLst>
+          </p:cNvPr>
+          <p:cNvSpPr txBox="1"/>
+          <p:nvPr/>
+        </p:nvSpPr>
+        <p:spPr>
+          <a:xfrm>
+            <a:off x="3268973" y="3517281"/>
+            <a:ext cx="952500" cy="338554"/>
+          </a:xfrm>
+          <a:prstGeom prst="rect">
+            <a:avLst/>
+          </a:prstGeom>
+          <a:noFill/>
+        </p:spPr>
+        <p:txBody>
+          <a:bodyPr wrap="square" rtlCol="0">
+            <a:spAutoFit/>
+          </a:bodyPr>
+          <a:lstStyle/>
+          <a:p>
+            <a:pPr algn="ctr"/>
+            <a:r>
+              <a:rPr lang="en-US" sz="1600" dirty="0" err="1">
+                <a:latin typeface="Source Sans Pro" panose="020B0503030403020204" pitchFamily="34" charset="0"/>
+                <a:ea typeface="Source Sans Pro" panose="020B0503030403020204" pitchFamily="34" charset="0"/>
+              </a:rPr>
+              <a:t>User</a:t>
+            </a:r>
+            <a:r>
+              <a:rPr lang="en-US" sz="1600" dirty="0">
+                <a:latin typeface="Source Sans Pro" panose="020B0503030403020204" pitchFamily="34" charset="0"/>
+                <a:ea typeface="Source Sans Pro" panose="020B0503030403020204" pitchFamily="34" charset="0"/>
+              </a:rPr>
+              <a:t>/</a:t>
+            </a:r>
+            <a:endParaRPr lang="en-US" sz="3200" dirty="0">
+              <a:latin typeface="Source Sans Pro" panose="020B0503030403020204" pitchFamily="34" charset="0"/>
+              <a:ea typeface="Source Sans Pro" panose="020B0503030403020204" pitchFamily="34" charset="0"/>
+            </a:endParaRPr>
+          </a:p>
+        </p:txBody>
+      </p:sp>
+      <p:pic>
+        <p:nvPicPr>
+          <p:cNvPr id="21" name="Picture 4" descr="Beige Folder Icon for Mac | Customizable and High-Quality">
+            <a:extLst>
+              <a:ext uri="{FF2B5EF4-FFF2-40B4-BE49-F238E27FC236}">
+                <a16:creationId xmlns:a16="http://schemas.microsoft.com/office/drawing/2014/main" id="{E85F2C09-43A7-F1CF-0D86-9B7DA1F8ECAA}"/>
+              </a:ext>
+            </a:extLst>
+          </p:cNvPr>
+          <p:cNvPicPr>
+            <a:picLocks noChangeAspect="1" noChangeArrowheads="1"/>
+          </p:cNvPicPr>
+          <p:nvPr/>
+        </p:nvPicPr>
+        <p:blipFill>
+          <a:blip r:embed="rId2">
+            <a:extLst>
+              <a:ext uri="{28A0092B-C50C-407E-A947-70E740481C1C}">
+                <a14:useLocalDpi xmlns:a14="http://schemas.microsoft.com/office/drawing/2010/main" val="0"/>
+              </a:ext>
+            </a:extLst>
+          </a:blip>
+          <a:srcRect/>
+          <a:stretch>
+            <a:fillRect/>
+          </a:stretch>
+        </p:blipFill>
+        <p:spPr bwMode="auto">
+          <a:xfrm>
+            <a:off x="248624" y="3112414"/>
+            <a:ext cx="894810" cy="894810"/>
+          </a:xfrm>
+          <a:prstGeom prst="rect">
+            <a:avLst/>
+          </a:prstGeom>
+          <a:noFill/>
+          <a:extLst>
+            <a:ext uri="{909E8E84-426E-40DD-AFC4-6F175D3DCCD1}">
+              <a14:hiddenFill xmlns:a14="http://schemas.microsoft.com/office/drawing/2010/main">
+                <a:solidFill>
+                  <a:srgbClr val="FFFFFF"/>
+                </a:solidFill>
+              </a14:hiddenFill>
+            </a:ext>
+          </a:extLst>
+        </p:spPr>
+      </p:pic>
+      <p:sp>
+        <p:nvSpPr>
+          <p:cNvPr id="22" name="TextBox 21">
+            <a:extLst>
+              <a:ext uri="{FF2B5EF4-FFF2-40B4-BE49-F238E27FC236}">
+                <a16:creationId xmlns:a16="http://schemas.microsoft.com/office/drawing/2014/main" id="{E04598BF-A2DF-8B9E-4BB6-177B083D8744}"/>
+              </a:ext>
+            </a:extLst>
+          </p:cNvPr>
+          <p:cNvSpPr txBox="1"/>
+          <p:nvPr/>
+        </p:nvSpPr>
+        <p:spPr>
+          <a:xfrm>
+            <a:off x="190934" y="3390542"/>
+            <a:ext cx="952500" cy="338554"/>
+          </a:xfrm>
+          <a:prstGeom prst="rect">
+            <a:avLst/>
+          </a:prstGeom>
+          <a:noFill/>
+        </p:spPr>
+        <p:txBody>
+          <a:bodyPr wrap="square" rtlCol="0">
+            <a:spAutoFit/>
+          </a:bodyPr>
+          <a:lstStyle/>
+          <a:p>
+            <a:pPr algn="ctr"/>
+            <a:r>
+              <a:rPr lang="en-US" sz="1600" dirty="0">
+                <a:latin typeface="Source Sans Pro" panose="020B0503030403020204" pitchFamily="34" charset="0"/>
+                <a:ea typeface="Source Sans Pro" panose="020B0503030403020204" pitchFamily="34" charset="0"/>
+              </a:rPr>
+              <a:t>Lab/</a:t>
+            </a:r>
+            <a:endParaRPr lang="en-US" sz="3200" dirty="0">
+              <a:latin typeface="Source Sans Pro" panose="020B0503030403020204" pitchFamily="34" charset="0"/>
+              <a:ea typeface="Source Sans Pro" panose="020B0503030403020204" pitchFamily="34" charset="0"/>
+            </a:endParaRPr>
+          </a:p>
+        </p:txBody>
+      </p:sp>
+      <p:cxnSp>
+        <p:nvCxnSpPr>
+          <p:cNvPr id="23" name="Straight Connector 22">
+            <a:extLst>
+              <a:ext uri="{FF2B5EF4-FFF2-40B4-BE49-F238E27FC236}">
+                <a16:creationId xmlns:a16="http://schemas.microsoft.com/office/drawing/2014/main" id="{D0093B80-2144-69FA-6F5F-AE244F14E25F}"/>
+              </a:ext>
+            </a:extLst>
+          </p:cNvPr>
+          <p:cNvCxnSpPr>
+            <a:cxnSpLocks/>
+          </p:cNvCxnSpPr>
+          <p:nvPr/>
+        </p:nvCxnSpPr>
+        <p:spPr>
+          <a:xfrm flipH="1" flipV="1">
+            <a:off x="2214304" y="2641152"/>
+            <a:ext cx="2863" cy="465036"/>
+          </a:xfrm>
+          <a:prstGeom prst="line">
+            <a:avLst/>
+          </a:prstGeom>
+          <a:ln>
+            <a:solidFill>
+              <a:schemeClr val="tx1"/>
+            </a:solidFill>
+          </a:ln>
+        </p:spPr>
+        <p:style>
+          <a:lnRef idx="2">
+            <a:schemeClr val="dk1"/>
+          </a:lnRef>
+          <a:fillRef idx="0">
+            <a:schemeClr val="dk1"/>
+          </a:fillRef>
+          <a:effectRef idx="1">
+            <a:schemeClr val="dk1"/>
+          </a:effectRef>
+          <a:fontRef idx="minor">
+            <a:schemeClr val="tx1"/>
+          </a:fontRef>
+        </p:style>
+      </p:cxnSp>
+      <p:cxnSp>
+        <p:nvCxnSpPr>
+          <p:cNvPr id="24" name="Straight Connector 23">
+            <a:extLst>
+              <a:ext uri="{FF2B5EF4-FFF2-40B4-BE49-F238E27FC236}">
+                <a16:creationId xmlns:a16="http://schemas.microsoft.com/office/drawing/2014/main" id="{82B9A47B-E495-D8FE-DE9F-5F4E3D09258D}"/>
+              </a:ext>
+            </a:extLst>
+          </p:cNvPr>
+          <p:cNvCxnSpPr>
+            <a:cxnSpLocks/>
+          </p:cNvCxnSpPr>
+          <p:nvPr/>
+        </p:nvCxnSpPr>
+        <p:spPr>
+          <a:xfrm flipV="1">
+            <a:off x="1149492" y="2695847"/>
+            <a:ext cx="628650" cy="477256"/>
+          </a:xfrm>
+          <a:prstGeom prst="line">
+            <a:avLst/>
+          </a:prstGeom>
+        </p:spPr>
+        <p:style>
+          <a:lnRef idx="2">
+            <a:schemeClr val="dk1"/>
+          </a:lnRef>
+          <a:fillRef idx="0">
+            <a:schemeClr val="dk1"/>
+          </a:fillRef>
+          <a:effectRef idx="1">
+            <a:schemeClr val="dk1"/>
+          </a:effectRef>
+          <a:fontRef idx="minor">
+            <a:schemeClr val="tx1"/>
+          </a:fontRef>
+        </p:style>
+      </p:cxnSp>
+      <p:cxnSp>
+        <p:nvCxnSpPr>
+          <p:cNvPr id="25" name="Straight Connector 24">
+            <a:extLst>
+              <a:ext uri="{FF2B5EF4-FFF2-40B4-BE49-F238E27FC236}">
+                <a16:creationId xmlns:a16="http://schemas.microsoft.com/office/drawing/2014/main" id="{BA7B3D2E-5BB7-0659-AD81-33F33C343CF2}"/>
+              </a:ext>
+            </a:extLst>
+          </p:cNvPr>
+          <p:cNvCxnSpPr>
+            <a:cxnSpLocks/>
+          </p:cNvCxnSpPr>
+          <p:nvPr/>
+        </p:nvCxnSpPr>
+        <p:spPr>
+          <a:xfrm>
+            <a:off x="2758385" y="2694187"/>
+            <a:ext cx="628650" cy="477256"/>
+          </a:xfrm>
+          <a:prstGeom prst="line">
+            <a:avLst/>
+          </a:prstGeom>
+        </p:spPr>
+        <p:style>
+          <a:lnRef idx="2">
+            <a:schemeClr val="dk1"/>
+          </a:lnRef>
+          <a:fillRef idx="0">
+            <a:schemeClr val="dk1"/>
+          </a:fillRef>
+          <a:effectRef idx="1">
+            <a:schemeClr val="dk1"/>
+          </a:effectRef>
+          <a:fontRef idx="minor">
+            <a:schemeClr val="tx1"/>
+          </a:fontRef>
+        </p:style>
+      </p:cxnSp>
+      <p:pic>
+        <p:nvPicPr>
+          <p:cNvPr id="32" name="Picture 4" descr="Beige Folder Icon for Mac | Customizable and High-Quality">
+            <a:extLst>
+              <a:ext uri="{FF2B5EF4-FFF2-40B4-BE49-F238E27FC236}">
+                <a16:creationId xmlns:a16="http://schemas.microsoft.com/office/drawing/2014/main" id="{437DB029-33E0-FBBA-7FCF-A972DA4E466D}"/>
+              </a:ext>
+            </a:extLst>
+          </p:cNvPr>
+          <p:cNvPicPr>
+            <a:picLocks noChangeAspect="1" noChangeArrowheads="1"/>
+          </p:cNvPicPr>
+          <p:nvPr/>
+        </p:nvPicPr>
+        <p:blipFill>
+          <a:blip r:embed="rId2">
+            <a:extLst>
+              <a:ext uri="{28A0092B-C50C-407E-A947-70E740481C1C}">
+                <a14:useLocalDpi xmlns:a14="http://schemas.microsoft.com/office/drawing/2010/main" val="0"/>
+              </a:ext>
+            </a:extLst>
+          </a:blip>
+          <a:srcRect/>
+          <a:stretch>
+            <a:fillRect/>
+          </a:stretch>
+        </p:blipFill>
+        <p:spPr bwMode="auto">
+          <a:xfrm>
+            <a:off x="4152991" y="4260533"/>
+            <a:ext cx="367354" cy="367354"/>
+          </a:xfrm>
+          <a:prstGeom prst="rect">
+            <a:avLst/>
+          </a:prstGeom>
+          <a:noFill/>
+          <a:extLst>
+            <a:ext uri="{909E8E84-426E-40DD-AFC4-6F175D3DCCD1}">
+              <a14:hiddenFill xmlns:a14="http://schemas.microsoft.com/office/drawing/2010/main">
+                <a:solidFill>
+                  <a:srgbClr val="FFFFFF"/>
+                </a:solidFill>
+              </a14:hiddenFill>
+            </a:ext>
+          </a:extLst>
+        </p:spPr>
+      </p:pic>
+      <p:sp>
+        <p:nvSpPr>
+          <p:cNvPr id="33" name="TextBox 32">
+            <a:extLst>
+              <a:ext uri="{FF2B5EF4-FFF2-40B4-BE49-F238E27FC236}">
+                <a16:creationId xmlns:a16="http://schemas.microsoft.com/office/drawing/2014/main" id="{24E0177A-8F0E-C34F-CD01-4E1739D0D599}"/>
+              </a:ext>
+            </a:extLst>
+          </p:cNvPr>
+          <p:cNvSpPr txBox="1"/>
+          <p:nvPr/>
+        </p:nvSpPr>
+        <p:spPr>
+          <a:xfrm>
+            <a:off x="3863593" y="4362058"/>
+            <a:ext cx="952500" cy="215444"/>
+          </a:xfrm>
+          <a:prstGeom prst="rect">
+            <a:avLst/>
+          </a:prstGeom>
+          <a:noFill/>
+        </p:spPr>
+        <p:txBody>
+          <a:bodyPr wrap="square" rtlCol="0">
+            <a:spAutoFit/>
+          </a:bodyPr>
+          <a:lstStyle/>
+          <a:p>
+            <a:pPr algn="ctr"/>
+            <a:r>
+              <a:rPr lang="en-US" sz="800" dirty="0">
+                <a:latin typeface="Source Sans Pro" panose="020B0503030403020204" pitchFamily="34" charset="0"/>
+                <a:ea typeface="Source Sans Pro" panose="020B0503030403020204" pitchFamily="34" charset="0"/>
+              </a:rPr>
+              <a:t>lei/</a:t>
+            </a:r>
+            <a:endParaRPr lang="en-US" sz="1200" dirty="0">
+              <a:latin typeface="Source Sans Pro" panose="020B0503030403020204" pitchFamily="34" charset="0"/>
+              <a:ea typeface="Source Sans Pro" panose="020B0503030403020204" pitchFamily="34" charset="0"/>
+            </a:endParaRPr>
+          </a:p>
+        </p:txBody>
+      </p:sp>
+      <p:cxnSp>
+        <p:nvCxnSpPr>
+          <p:cNvPr id="34" name="Straight Connector 33">
+            <a:extLst>
+              <a:ext uri="{FF2B5EF4-FFF2-40B4-BE49-F238E27FC236}">
+                <a16:creationId xmlns:a16="http://schemas.microsoft.com/office/drawing/2014/main" id="{4C37AD7D-1206-7E1A-5453-2E068F2401A9}"/>
+              </a:ext>
+            </a:extLst>
+          </p:cNvPr>
+          <p:cNvCxnSpPr>
+            <a:cxnSpLocks/>
+          </p:cNvCxnSpPr>
+          <p:nvPr/>
+        </p:nvCxnSpPr>
+        <p:spPr>
+          <a:xfrm>
+            <a:off x="3939549" y="4034442"/>
+            <a:ext cx="281924" cy="277231"/>
+          </a:xfrm>
+          <a:prstGeom prst="line">
+            <a:avLst/>
+          </a:prstGeom>
+        </p:spPr>
+        <p:style>
+          <a:lnRef idx="2">
+            <a:schemeClr val="dk1"/>
+          </a:lnRef>
+          <a:fillRef idx="0">
+            <a:schemeClr val="dk1"/>
+          </a:fillRef>
+          <a:effectRef idx="1">
+            <a:schemeClr val="dk1"/>
+          </a:effectRef>
+          <a:fontRef idx="minor">
+            <a:schemeClr val="tx1"/>
+          </a:fontRef>
+        </p:style>
+      </p:cxnSp>
+      <p:pic>
+        <p:nvPicPr>
+          <p:cNvPr id="36" name="Picture 4" descr="Beige Folder Icon for Mac | Customizable and High-Quality">
+            <a:extLst>
+              <a:ext uri="{FF2B5EF4-FFF2-40B4-BE49-F238E27FC236}">
+                <a16:creationId xmlns:a16="http://schemas.microsoft.com/office/drawing/2014/main" id="{86C9D7B6-3FF4-B472-62F4-D481E38608C2}"/>
+              </a:ext>
+            </a:extLst>
+          </p:cNvPr>
+          <p:cNvPicPr>
+            <a:picLocks noChangeAspect="1" noChangeArrowheads="1"/>
+          </p:cNvPicPr>
+          <p:nvPr/>
+        </p:nvPicPr>
+        <p:blipFill>
+          <a:blip r:embed="rId2">
+            <a:extLst>
+              <a:ext uri="{28A0092B-C50C-407E-A947-70E740481C1C}">
+                <a14:useLocalDpi xmlns:a14="http://schemas.microsoft.com/office/drawing/2010/main" val="0"/>
+              </a:ext>
+            </a:extLst>
+          </a:blip>
+          <a:srcRect/>
+          <a:stretch>
+            <a:fillRect/>
+          </a:stretch>
+        </p:blipFill>
+        <p:spPr bwMode="auto">
+          <a:xfrm>
+            <a:off x="1388165" y="4336145"/>
+            <a:ext cx="793750" cy="793750"/>
+          </a:xfrm>
+          <a:prstGeom prst="rect">
+            <a:avLst/>
+          </a:prstGeom>
+          <a:noFill/>
+          <a:extLst>
+            <a:ext uri="{909E8E84-426E-40DD-AFC4-6F175D3DCCD1}">
+              <a14:hiddenFill xmlns:a14="http://schemas.microsoft.com/office/drawing/2010/main">
+                <a:solidFill>
+                  <a:srgbClr val="FFFFFF"/>
+                </a:solidFill>
+              </a14:hiddenFill>
+            </a:ext>
+          </a:extLst>
+        </p:spPr>
+      </p:pic>
+      <p:cxnSp>
+        <p:nvCxnSpPr>
+          <p:cNvPr id="37" name="Straight Connector 36">
+            <a:extLst>
+              <a:ext uri="{FF2B5EF4-FFF2-40B4-BE49-F238E27FC236}">
+                <a16:creationId xmlns:a16="http://schemas.microsoft.com/office/drawing/2014/main" id="{AE914F46-D751-E32F-AFA3-14DC1C7DC0EF}"/>
+              </a:ext>
+            </a:extLst>
+          </p:cNvPr>
+          <p:cNvCxnSpPr>
+            <a:cxnSpLocks/>
+          </p:cNvCxnSpPr>
+          <p:nvPr/>
+        </p:nvCxnSpPr>
+        <p:spPr>
+          <a:xfrm flipV="1">
+            <a:off x="1842964" y="3963217"/>
+            <a:ext cx="325496" cy="499413"/>
+          </a:xfrm>
+          <a:prstGeom prst="line">
+            <a:avLst/>
+          </a:prstGeom>
+          <a:ln>
+            <a:solidFill>
+              <a:schemeClr val="tx1"/>
+            </a:solidFill>
+          </a:ln>
+        </p:spPr>
+        <p:style>
+          <a:lnRef idx="2">
+            <a:schemeClr val="dk1"/>
+          </a:lnRef>
+          <a:fillRef idx="0">
+            <a:schemeClr val="dk1"/>
+          </a:fillRef>
+          <a:effectRef idx="1">
+            <a:schemeClr val="dk1"/>
+          </a:effectRef>
+          <a:fontRef idx="minor">
+            <a:schemeClr val="tx1"/>
+          </a:fontRef>
+        </p:style>
+      </p:cxnSp>
+      <p:pic>
+        <p:nvPicPr>
+          <p:cNvPr id="40" name="Picture 4" descr="Beige Folder Icon for Mac | Customizable and High-Quality">
+            <a:extLst>
+              <a:ext uri="{FF2B5EF4-FFF2-40B4-BE49-F238E27FC236}">
+                <a16:creationId xmlns:a16="http://schemas.microsoft.com/office/drawing/2014/main" id="{D5775910-D78C-BCAC-3E98-14570551908E}"/>
+              </a:ext>
+            </a:extLst>
+          </p:cNvPr>
+          <p:cNvPicPr>
+            <a:picLocks noChangeAspect="1" noChangeArrowheads="1"/>
+          </p:cNvPicPr>
+          <p:nvPr/>
+        </p:nvPicPr>
+        <p:blipFill>
+          <a:blip r:embed="rId2">
+            <a:extLst>
+              <a:ext uri="{28A0092B-C50C-407E-A947-70E740481C1C}">
+                <a14:useLocalDpi xmlns:a14="http://schemas.microsoft.com/office/drawing/2010/main" val="0"/>
+              </a:ext>
+            </a:extLst>
+          </a:blip>
+          <a:srcRect/>
+          <a:stretch>
+            <a:fillRect/>
+          </a:stretch>
+        </p:blipFill>
+        <p:spPr bwMode="auto">
+          <a:xfrm>
+            <a:off x="24758" y="4362058"/>
+            <a:ext cx="793750" cy="793750"/>
+          </a:xfrm>
+          <a:prstGeom prst="rect">
+            <a:avLst/>
+          </a:prstGeom>
+          <a:noFill/>
+          <a:extLst>
+            <a:ext uri="{909E8E84-426E-40DD-AFC4-6F175D3DCCD1}">
+              <a14:hiddenFill xmlns:a14="http://schemas.microsoft.com/office/drawing/2010/main">
+                <a:solidFill>
+                  <a:srgbClr val="FFFFFF"/>
+                </a:solidFill>
+              </a14:hiddenFill>
+            </a:ext>
+          </a:extLst>
+        </p:spPr>
+      </p:pic>
+      <p:cxnSp>
+        <p:nvCxnSpPr>
+          <p:cNvPr id="41" name="Straight Connector 40">
+            <a:extLst>
+              <a:ext uri="{FF2B5EF4-FFF2-40B4-BE49-F238E27FC236}">
+                <a16:creationId xmlns:a16="http://schemas.microsoft.com/office/drawing/2014/main" id="{8E90098A-4F81-050F-DDE9-466D7AB2D648}"/>
+              </a:ext>
+            </a:extLst>
+          </p:cNvPr>
+          <p:cNvCxnSpPr>
+            <a:cxnSpLocks/>
+          </p:cNvCxnSpPr>
+          <p:nvPr/>
+        </p:nvCxnSpPr>
+        <p:spPr>
+          <a:xfrm flipV="1">
+            <a:off x="408971" y="3968428"/>
+            <a:ext cx="325496" cy="499413"/>
+          </a:xfrm>
+          <a:prstGeom prst="line">
+            <a:avLst/>
+          </a:prstGeom>
+          <a:ln>
+            <a:solidFill>
+              <a:schemeClr val="tx1"/>
+            </a:solidFill>
+          </a:ln>
+        </p:spPr>
+        <p:style>
+          <a:lnRef idx="2">
+            <a:schemeClr val="dk1"/>
+          </a:lnRef>
+          <a:fillRef idx="0">
+            <a:schemeClr val="dk1"/>
+          </a:fillRef>
+          <a:effectRef idx="1">
+            <a:schemeClr val="dk1"/>
+          </a:effectRef>
+          <a:fontRef idx="minor">
+            <a:schemeClr val="tx1"/>
+          </a:fontRef>
+        </p:style>
+      </p:cxnSp>
+      <p:sp>
+        <p:nvSpPr>
+          <p:cNvPr id="42" name="TextBox 41">
+            <a:extLst>
+              <a:ext uri="{FF2B5EF4-FFF2-40B4-BE49-F238E27FC236}">
+                <a16:creationId xmlns:a16="http://schemas.microsoft.com/office/drawing/2014/main" id="{34F88807-BEF1-BC70-CEA8-72EC171B0C82}"/>
+              </a:ext>
+            </a:extLst>
+          </p:cNvPr>
+          <p:cNvSpPr txBox="1"/>
+          <p:nvPr/>
+        </p:nvSpPr>
+        <p:spPr>
+          <a:xfrm>
+            <a:off x="-67279" y="4627887"/>
+            <a:ext cx="952500" cy="307777"/>
+          </a:xfrm>
+          <a:prstGeom prst="rect">
+            <a:avLst/>
+          </a:prstGeom>
+          <a:noFill/>
+        </p:spPr>
+        <p:txBody>
+          <a:bodyPr wrap="square" rtlCol="0">
+            <a:spAutoFit/>
+          </a:bodyPr>
+          <a:lstStyle/>
+          <a:p>
+            <a:pPr algn="ctr"/>
+            <a:r>
+              <a:rPr lang="en-US" sz="1400" dirty="0">
+                <a:latin typeface="Source Sans Pro" panose="020B0503030403020204" pitchFamily="34" charset="0"/>
+                <a:ea typeface="Source Sans Pro" panose="020B0503030403020204" pitchFamily="34" charset="0"/>
+              </a:rPr>
+              <a:t>projectA</a:t>
+            </a:r>
+          </a:p>
+        </p:txBody>
+      </p:sp>
+      <p:sp>
+        <p:nvSpPr>
+          <p:cNvPr id="43" name="TextBox 42">
+            <a:extLst>
+              <a:ext uri="{FF2B5EF4-FFF2-40B4-BE49-F238E27FC236}">
+                <a16:creationId xmlns:a16="http://schemas.microsoft.com/office/drawing/2014/main" id="{5E4865BD-55A1-6C59-FC33-F6D5AA22D0E4}"/>
+              </a:ext>
+            </a:extLst>
+          </p:cNvPr>
+          <p:cNvSpPr txBox="1"/>
+          <p:nvPr/>
+        </p:nvSpPr>
+        <p:spPr>
+          <a:xfrm>
+            <a:off x="1301892" y="4605044"/>
+            <a:ext cx="952500" cy="307777"/>
+          </a:xfrm>
+          <a:prstGeom prst="rect">
+            <a:avLst/>
+          </a:prstGeom>
+          <a:noFill/>
+        </p:spPr>
+        <p:txBody>
+          <a:bodyPr wrap="square" rtlCol="0">
+            <a:spAutoFit/>
+          </a:bodyPr>
+          <a:lstStyle/>
+          <a:p>
+            <a:pPr algn="ctr"/>
+            <a:r>
+              <a:rPr lang="en-US" sz="1400" dirty="0">
+                <a:latin typeface="Source Sans Pro" panose="020B0503030403020204" pitchFamily="34" charset="0"/>
+                <a:ea typeface="Source Sans Pro" panose="020B0503030403020204" pitchFamily="34" charset="0"/>
+              </a:rPr>
+              <a:t>ProjectB</a:t>
+            </a:r>
+          </a:p>
+        </p:txBody>
+      </p:sp>
+      <p:pic>
+        <p:nvPicPr>
+          <p:cNvPr id="46" name="Graphic 45" descr="Paper outline">
+            <a:extLst>
+              <a:ext uri="{FF2B5EF4-FFF2-40B4-BE49-F238E27FC236}">
+                <a16:creationId xmlns:a16="http://schemas.microsoft.com/office/drawing/2014/main" id="{958AC6A8-DE16-06BF-37F8-BAC2BA0A4A83}"/>
+              </a:ext>
+            </a:extLst>
+          </p:cNvPr>
+          <p:cNvPicPr>
+            <a:picLocks noChangeAspect="1"/>
+          </p:cNvPicPr>
+          <p:nvPr/>
+        </p:nvPicPr>
+        <p:blipFill>
+          <a:blip r:embed="rId3">
+            <a:extLst>
+              <a:ext uri="{96DAC541-7B7A-43D3-8B79-37D633B846F1}">
+                <asvg:svgBlip xmlns:asvg="http://schemas.microsoft.com/office/drawing/2016/SVG/main" r:embed="rId4"/>
+              </a:ext>
+            </a:extLst>
+          </a:blip>
+          <a:stretch>
+            <a:fillRect/>
+          </a:stretch>
+        </p:blipFill>
+        <p:spPr>
+          <a:xfrm>
+            <a:off x="-95892" y="5825509"/>
+            <a:ext cx="914400" cy="914400"/>
+          </a:xfrm>
+          <a:prstGeom prst="rect">
+            <a:avLst/>
+          </a:prstGeom>
+        </p:spPr>
+      </p:pic>
+      <p:sp>
+        <p:nvSpPr>
+          <p:cNvPr id="47" name="TextBox 46">
+            <a:extLst>
+              <a:ext uri="{FF2B5EF4-FFF2-40B4-BE49-F238E27FC236}">
+                <a16:creationId xmlns:a16="http://schemas.microsoft.com/office/drawing/2014/main" id="{3FE4BADB-EEF0-493D-DED6-742ED58173F7}"/>
+              </a:ext>
+            </a:extLst>
+          </p:cNvPr>
+          <p:cNvSpPr txBox="1"/>
+          <p:nvPr/>
+        </p:nvSpPr>
+        <p:spPr>
+          <a:xfrm>
+            <a:off x="173136" y="6305357"/>
+            <a:ext cx="420308" cy="369332"/>
+          </a:xfrm>
+          <a:prstGeom prst="rect">
+            <a:avLst/>
+          </a:prstGeom>
+          <a:noFill/>
+        </p:spPr>
+        <p:txBody>
+          <a:bodyPr wrap="none" rtlCol="0">
+            <a:spAutoFit/>
+          </a:bodyPr>
+          <a:lstStyle/>
+          <a:p>
+            <a:r>
+              <a:rPr lang="en-US"/>
+              <a:t>lei</a:t>
+            </a:r>
+          </a:p>
+        </p:txBody>
+      </p:sp>
+      <p:cxnSp>
+        <p:nvCxnSpPr>
+          <p:cNvPr id="48" name="Straight Connector 47">
+            <a:extLst>
+              <a:ext uri="{FF2B5EF4-FFF2-40B4-BE49-F238E27FC236}">
+                <a16:creationId xmlns:a16="http://schemas.microsoft.com/office/drawing/2014/main" id="{4D93EDA8-6E05-06C6-2145-402D01CEA386}"/>
+              </a:ext>
+            </a:extLst>
+          </p:cNvPr>
+          <p:cNvCxnSpPr>
+            <a:cxnSpLocks/>
+          </p:cNvCxnSpPr>
+          <p:nvPr/>
+        </p:nvCxnSpPr>
+        <p:spPr>
+          <a:xfrm flipV="1">
+            <a:off x="255494" y="5118702"/>
+            <a:ext cx="226237" cy="622541"/>
+          </a:xfrm>
+          <a:prstGeom prst="line">
+            <a:avLst/>
+          </a:prstGeom>
+          <a:ln>
+            <a:solidFill>
+              <a:schemeClr val="tx1"/>
+            </a:solidFill>
+          </a:ln>
+        </p:spPr>
+        <p:style>
+          <a:lnRef idx="2">
+            <a:schemeClr val="dk1"/>
+          </a:lnRef>
+          <a:fillRef idx="0">
+            <a:schemeClr val="dk1"/>
+          </a:fillRef>
+          <a:effectRef idx="1">
+            <a:schemeClr val="dk1"/>
+          </a:effectRef>
+          <a:fontRef idx="minor">
+            <a:schemeClr val="tx1"/>
+          </a:fontRef>
+        </p:style>
+      </p:cxnSp>
+      <p:cxnSp>
+        <p:nvCxnSpPr>
+          <p:cNvPr id="50" name="Straight Connector 49">
+            <a:extLst>
+              <a:ext uri="{FF2B5EF4-FFF2-40B4-BE49-F238E27FC236}">
+                <a16:creationId xmlns:a16="http://schemas.microsoft.com/office/drawing/2014/main" id="{9BE5C159-B721-C77B-DE89-3050A2CD8914}"/>
+              </a:ext>
+            </a:extLst>
+          </p:cNvPr>
+          <p:cNvCxnSpPr>
+            <a:cxnSpLocks/>
+          </p:cNvCxnSpPr>
+          <p:nvPr/>
+        </p:nvCxnSpPr>
+        <p:spPr>
+          <a:xfrm flipH="1" flipV="1">
+            <a:off x="723423" y="5134125"/>
+            <a:ext cx="664742" cy="653709"/>
+          </a:xfrm>
+          <a:prstGeom prst="line">
+            <a:avLst/>
+          </a:prstGeom>
+          <a:ln>
+            <a:solidFill>
+              <a:schemeClr val="tx1"/>
+            </a:solidFill>
+          </a:ln>
+        </p:spPr>
+        <p:style>
+          <a:lnRef idx="2">
+            <a:schemeClr val="dk1"/>
+          </a:lnRef>
+          <a:fillRef idx="0">
+            <a:schemeClr val="dk1"/>
+          </a:fillRef>
+          <a:effectRef idx="1">
+            <a:schemeClr val="dk1"/>
+          </a:effectRef>
+          <a:fontRef idx="minor">
+            <a:schemeClr val="tx1"/>
+          </a:fontRef>
+        </p:style>
+      </p:cxnSp>
+      <p:pic>
+        <p:nvPicPr>
+          <p:cNvPr id="52" name="Graphic 51" descr="Paper outline">
+            <a:extLst>
+              <a:ext uri="{FF2B5EF4-FFF2-40B4-BE49-F238E27FC236}">
+                <a16:creationId xmlns:a16="http://schemas.microsoft.com/office/drawing/2014/main" id="{4A0A34BC-C26E-DD7F-963D-C4BE49C9017B}"/>
+              </a:ext>
+            </a:extLst>
+          </p:cNvPr>
+          <p:cNvPicPr>
+            <a:picLocks noChangeAspect="1"/>
+          </p:cNvPicPr>
+          <p:nvPr/>
+        </p:nvPicPr>
+        <p:blipFill>
+          <a:blip r:embed="rId3">
+            <a:extLst>
+              <a:ext uri="{96DAC541-7B7A-43D3-8B79-37D633B846F1}">
+                <asvg:svgBlip xmlns:asvg="http://schemas.microsoft.com/office/drawing/2016/SVG/main" r:embed="rId4"/>
+              </a:ext>
+            </a:extLst>
+          </a:blip>
+          <a:stretch>
+            <a:fillRect/>
+          </a:stretch>
+        </p:blipFill>
+        <p:spPr>
+          <a:xfrm>
+            <a:off x="1078571" y="5819538"/>
+            <a:ext cx="914400" cy="914400"/>
+          </a:xfrm>
+          <a:prstGeom prst="rect">
+            <a:avLst/>
+          </a:prstGeom>
+        </p:spPr>
+      </p:pic>
+      <p:sp>
+        <p:nvSpPr>
+          <p:cNvPr id="53" name="TextBox 52">
+            <a:extLst>
+              <a:ext uri="{FF2B5EF4-FFF2-40B4-BE49-F238E27FC236}">
+                <a16:creationId xmlns:a16="http://schemas.microsoft.com/office/drawing/2014/main" id="{2529C88D-916C-A6B8-CFE5-4975504A0707}"/>
+              </a:ext>
+            </a:extLst>
+          </p:cNvPr>
+          <p:cNvSpPr txBox="1"/>
+          <p:nvPr/>
+        </p:nvSpPr>
+        <p:spPr>
+          <a:xfrm>
+            <a:off x="1177307" y="6316536"/>
+            <a:ext cx="716928" cy="369332"/>
+          </a:xfrm>
+          <a:prstGeom prst="rect">
+            <a:avLst/>
+          </a:prstGeom>
+          <a:noFill/>
+        </p:spPr>
+        <p:txBody>
+          <a:bodyPr wrap="none" rtlCol="0">
+            <a:spAutoFit/>
+          </a:bodyPr>
+          <a:lstStyle/>
+          <a:p>
+            <a:r>
+              <a:rPr lang="en-US"/>
+              <a:t>gregg</a:t>
+            </a:r>
+          </a:p>
+        </p:txBody>
+      </p:sp>
+    </p:spTree>
+    <p:extLst>
+      <p:ext uri="{BB962C8B-B14F-4D97-AF65-F5344CB8AC3E}">
+        <p14:creationId xmlns:p14="http://schemas.microsoft.com/office/powerpoint/2010/main" val="3310723963"/>
+      </p:ext>
+    </p:extLst>
+  </p:cSld>
+  <p:clrMapOvr>
+    <a:masterClrMapping/>
+  </p:clrMapOvr>
+</p:sld>
+</file>
+
+<file path=ppt/slides/slide5.xml><?xml version="1.0" encoding="utf-8"?>
 <p:sld xmlns:a="http://schemas.openxmlformats.org/drawingml/2006/main" xmlns:r="http://schemas.openxmlformats.org/officeDocument/2006/relationships" xmlns:p="http://schemas.openxmlformats.org/presentationml/2006/main">
   <p:cSld>
     <p:spTree>
@@ -7485,7 +10206,7 @@
 </p:sld>
 </file>
 
-<file path=ppt/slides/slide5.xml><?xml version="1.0" encoding="utf-8"?>
+<file path=ppt/slides/slide6.xml><?xml version="1.0" encoding="utf-8"?>
 <p:sld xmlns:a="http://schemas.openxmlformats.org/drawingml/2006/main" xmlns:r="http://schemas.openxmlformats.org/officeDocument/2006/relationships" xmlns:p="http://schemas.openxmlformats.org/presentationml/2006/main">
   <p:cSld>
     <p:spTree>
@@ -8678,7 +11399,7 @@
 </p:sld>
 </file>
 
-<file path=ppt/slides/slide6.xml><?xml version="1.0" encoding="utf-8"?>
+<file path=ppt/slides/slide7.xml><?xml version="1.0" encoding="utf-8"?>
 <p:sld xmlns:a="http://schemas.openxmlformats.org/drawingml/2006/main" xmlns:r="http://schemas.openxmlformats.org/officeDocument/2006/relationships" xmlns:p="http://schemas.openxmlformats.org/presentationml/2006/main">
   <p:cSld>
     <p:spTree>
@@ -9211,7 +11932,7 @@
 </p:sld>
 </file>
 
-<file path=ppt/slides/slide7.xml><?xml version="1.0" encoding="utf-8"?>
+<file path=ppt/slides/slide8.xml><?xml version="1.0" encoding="utf-8"?>
 <p:sld xmlns:a="http://schemas.openxmlformats.org/drawingml/2006/main" xmlns:r="http://schemas.openxmlformats.org/officeDocument/2006/relationships" xmlns:p="http://schemas.openxmlformats.org/presentationml/2006/main">
   <p:cSld>
     <p:spTree>
@@ -9716,7 +12437,7 @@
 </p:sld>
 </file>
 
-<file path=ppt/slides/slide8.xml><?xml version="1.0" encoding="utf-8"?>
+<file path=ppt/slides/slide9.xml><?xml version="1.0" encoding="utf-8"?>
 <p:sld xmlns:a="http://schemas.openxmlformats.org/drawingml/2006/main" xmlns:r="http://schemas.openxmlformats.org/officeDocument/2006/relationships" xmlns:p="http://schemas.openxmlformats.org/presentationml/2006/main">
   <p:cSld>
     <p:spTree>
@@ -10274,355 +12995,6 @@
     <p:extLst>
       <p:ext uri="{BB962C8B-B14F-4D97-AF65-F5344CB8AC3E}">
         <p14:creationId xmlns:p14="http://schemas.microsoft.com/office/powerpoint/2010/main" val="3120722844"/>
-      </p:ext>
-    </p:extLst>
-  </p:cSld>
-  <p:clrMapOvr>
-    <a:masterClrMapping/>
-  </p:clrMapOvr>
-</p:sld>
-</file>
-
-<file path=ppt/slides/slide9.xml><?xml version="1.0" encoding="utf-8"?>
-<p:sld xmlns:a="http://schemas.openxmlformats.org/drawingml/2006/main" xmlns:r="http://schemas.openxmlformats.org/officeDocument/2006/relationships" xmlns:p="http://schemas.openxmlformats.org/presentationml/2006/main">
-  <p:cSld>
-    <p:spTree>
-      <p:nvGrpSpPr>
-        <p:cNvPr id="1" name=""/>
-        <p:cNvGrpSpPr/>
-        <p:nvPr/>
-      </p:nvGrpSpPr>
-      <p:grpSpPr>
-        <a:xfrm>
-          <a:off x="0" y="0"/>
-          <a:ext cx="0" cy="0"/>
-          <a:chOff x="0" y="0"/>
-          <a:chExt cx="0" cy="0"/>
-        </a:xfrm>
-      </p:grpSpPr>
-      <p:sp>
-        <p:nvSpPr>
-          <p:cNvPr id="2" name="Title 1">
-            <a:extLst>
-              <a:ext uri="{FF2B5EF4-FFF2-40B4-BE49-F238E27FC236}">
-                <a16:creationId xmlns:a16="http://schemas.microsoft.com/office/drawing/2014/main" id="{2BA248C4-2FC8-A1A1-3A88-0D9C4F94935B}"/>
-              </a:ext>
-            </a:extLst>
-          </p:cNvPr>
-          <p:cNvSpPr>
-            <a:spLocks noGrp="1"/>
-          </p:cNvSpPr>
-          <p:nvPr>
-            <p:ph type="title"/>
-          </p:nvPr>
-        </p:nvSpPr>
-        <p:spPr/>
-        <p:txBody>
-          <a:bodyPr/>
-          <a:lstStyle/>
-          <a:p>
-            <a:r>
-              <a:rPr lang="en-US"/>
-              <a:t>Mounting labshare to local computer</a:t>
-            </a:r>
-          </a:p>
-        </p:txBody>
-      </p:sp>
-      <p:sp>
-        <p:nvSpPr>
-          <p:cNvPr id="3" name="Content Placeholder 2">
-            <a:extLst>
-              <a:ext uri="{FF2B5EF4-FFF2-40B4-BE49-F238E27FC236}">
-                <a16:creationId xmlns:a16="http://schemas.microsoft.com/office/drawing/2014/main" id="{BC79810C-D812-A3BB-AD05-D961978C0C04}"/>
-              </a:ext>
-            </a:extLst>
-          </p:cNvPr>
-          <p:cNvSpPr>
-            <a:spLocks noGrp="1"/>
-          </p:cNvSpPr>
-          <p:nvPr>
-            <p:ph idx="1"/>
-          </p:nvPr>
-        </p:nvSpPr>
-        <p:spPr/>
-        <p:txBody>
-          <a:bodyPr/>
-          <a:lstStyle/>
-          <a:p>
-            <a:r>
-              <a:rPr lang="en-US"/>
-              <a:t>Only tier 1 and tier 2 storage is mountable, not tier 0 or scratch </a:t>
-            </a:r>
-          </a:p>
-          <a:p>
-            <a:pPr marL="0" indent="0">
-              <a:buNone/>
-            </a:pPr>
-            <a:endParaRPr lang="en-US"/>
-          </a:p>
-          <a:p>
-            <a:pPr marL="0" indent="0">
-              <a:buNone/>
-            </a:pPr>
-            <a:r>
-              <a:rPr lang="en-US"/>
-              <a:t>Steps (no demo)</a:t>
-            </a:r>
-          </a:p>
-          <a:p>
-            <a:pPr marL="514350" indent="-514350">
-              <a:buFont typeface="+mj-lt"/>
-              <a:buAutoNum type="arabicPeriod"/>
-            </a:pPr>
-            <a:r>
-              <a:rPr lang="en-US"/>
-              <a:t>Ask someone in your lab if directions exist, if so complete!</a:t>
-            </a:r>
-          </a:p>
-          <a:p>
-            <a:pPr marL="514350" indent="-514350">
-              <a:buFont typeface="+mj-lt"/>
-              <a:buAutoNum type="arabicPeriod"/>
-            </a:pPr>
-            <a:r>
-              <a:rPr lang="en-US"/>
-              <a:t>Ask FASRC during office hours 😅</a:t>
-            </a:r>
-          </a:p>
-        </p:txBody>
-      </p:sp>
-      <p:grpSp>
-        <p:nvGrpSpPr>
-          <p:cNvPr id="4" name="Group 3">
-            <a:extLst>
-              <a:ext uri="{FF2B5EF4-FFF2-40B4-BE49-F238E27FC236}">
-                <a16:creationId xmlns:a16="http://schemas.microsoft.com/office/drawing/2014/main" id="{5873E92D-27BA-11EF-6EA7-CF75D0DC3C47}"/>
-              </a:ext>
-            </a:extLst>
-          </p:cNvPr>
-          <p:cNvGrpSpPr/>
-          <p:nvPr/>
-        </p:nvGrpSpPr>
-        <p:grpSpPr>
-          <a:xfrm>
-            <a:off x="6229525" y="4391467"/>
-            <a:ext cx="1101648" cy="1283732"/>
-            <a:chOff x="5643892" y="387638"/>
-            <a:chExt cx="1101648" cy="1283732"/>
-          </a:xfrm>
-        </p:grpSpPr>
-        <p:pic>
-          <p:nvPicPr>
-            <p:cNvPr id="5" name="Graphic 4" descr="Server with solid fill">
-              <a:extLst>
-                <a:ext uri="{FF2B5EF4-FFF2-40B4-BE49-F238E27FC236}">
-                  <a16:creationId xmlns:a16="http://schemas.microsoft.com/office/drawing/2014/main" id="{03536E63-5F3C-5203-B56A-B3BB466C9256}"/>
-                </a:ext>
-              </a:extLst>
-            </p:cNvPr>
-            <p:cNvPicPr>
-              <a:picLocks noChangeAspect="1"/>
-            </p:cNvPicPr>
-            <p:nvPr/>
-          </p:nvPicPr>
-          <p:blipFill>
-            <a:blip r:embed="rId2">
-              <a:extLst>
-                <a:ext uri="{96DAC541-7B7A-43D3-8B79-37D633B846F1}">
-                  <asvg:svgBlip xmlns:asvg="http://schemas.microsoft.com/office/drawing/2016/SVG/main" r:embed="rId3"/>
-                </a:ext>
-              </a:extLst>
-            </a:blip>
-            <a:stretch>
-              <a:fillRect/>
-            </a:stretch>
-          </p:blipFill>
-          <p:spPr>
-            <a:xfrm>
-              <a:off x="5737516" y="387638"/>
-              <a:ext cx="914400" cy="914400"/>
-            </a:xfrm>
-            <a:prstGeom prst="rect">
-              <a:avLst/>
-            </a:prstGeom>
-          </p:spPr>
-        </p:pic>
-        <p:sp>
-          <p:nvSpPr>
-            <p:cNvPr id="6" name="TextBox 5">
-              <a:extLst>
-                <a:ext uri="{FF2B5EF4-FFF2-40B4-BE49-F238E27FC236}">
-                  <a16:creationId xmlns:a16="http://schemas.microsoft.com/office/drawing/2014/main" id="{D9CE85B7-EAE1-3660-3D8C-97B0BCF99685}"/>
-                </a:ext>
-              </a:extLst>
-            </p:cNvPr>
-            <p:cNvSpPr txBox="1"/>
-            <p:nvPr/>
-          </p:nvSpPr>
-          <p:spPr>
-            <a:xfrm>
-              <a:off x="5643892" y="1302038"/>
-              <a:ext cx="1101648" cy="369332"/>
-            </a:xfrm>
-            <a:prstGeom prst="rect">
-              <a:avLst/>
-            </a:prstGeom>
-            <a:noFill/>
-          </p:spPr>
-          <p:txBody>
-            <a:bodyPr wrap="none" rtlCol="0">
-              <a:spAutoFit/>
-            </a:bodyPr>
-            <a:lstStyle/>
-            <a:p>
-              <a:r>
-                <a:rPr lang="en-US"/>
-                <a:t>lab share</a:t>
-              </a:r>
-            </a:p>
-          </p:txBody>
-        </p:sp>
-      </p:grpSp>
-      <p:grpSp>
-        <p:nvGrpSpPr>
-          <p:cNvPr id="7" name="Group 6">
-            <a:extLst>
-              <a:ext uri="{FF2B5EF4-FFF2-40B4-BE49-F238E27FC236}">
-                <a16:creationId xmlns:a16="http://schemas.microsoft.com/office/drawing/2014/main" id="{3C4FF97E-AF53-80E4-918B-9354BB3016A7}"/>
-              </a:ext>
-            </a:extLst>
-          </p:cNvPr>
-          <p:cNvGrpSpPr/>
-          <p:nvPr/>
-        </p:nvGrpSpPr>
-        <p:grpSpPr>
-          <a:xfrm>
-            <a:off x="9479230" y="4391467"/>
-            <a:ext cx="1161344" cy="1099066"/>
-            <a:chOff x="2170185" y="4087564"/>
-            <a:chExt cx="1161344" cy="1099066"/>
-          </a:xfrm>
-        </p:grpSpPr>
-        <p:sp>
-          <p:nvSpPr>
-            <p:cNvPr id="8" name="TextBox 7">
-              <a:extLst>
-                <a:ext uri="{FF2B5EF4-FFF2-40B4-BE49-F238E27FC236}">
-                  <a16:creationId xmlns:a16="http://schemas.microsoft.com/office/drawing/2014/main" id="{DEA31A3D-6242-701A-5E13-23459AFDD18F}"/>
-                </a:ext>
-              </a:extLst>
-            </p:cNvPr>
-            <p:cNvSpPr txBox="1"/>
-            <p:nvPr/>
-          </p:nvSpPr>
-          <p:spPr>
-            <a:xfrm>
-              <a:off x="2170185" y="4817298"/>
-              <a:ext cx="1161344" cy="369332"/>
-            </a:xfrm>
-            <a:prstGeom prst="rect">
-              <a:avLst/>
-            </a:prstGeom>
-            <a:noFill/>
-          </p:spPr>
-          <p:txBody>
-            <a:bodyPr wrap="none" rtlCol="0">
-              <a:spAutoFit/>
-            </a:bodyPr>
-            <a:lstStyle/>
-            <a:p>
-              <a:r>
-                <a:rPr lang="en-US"/>
-                <a:t>computer</a:t>
-              </a:r>
-            </a:p>
-          </p:txBody>
-        </p:sp>
-        <p:pic>
-          <p:nvPicPr>
-            <p:cNvPr id="9" name="Graphic 8" descr="Computer with solid fill">
-              <a:extLst>
-                <a:ext uri="{FF2B5EF4-FFF2-40B4-BE49-F238E27FC236}">
-                  <a16:creationId xmlns:a16="http://schemas.microsoft.com/office/drawing/2014/main" id="{54F769C9-F758-C69B-9AD7-B13CA7261AD5}"/>
-                </a:ext>
-              </a:extLst>
-            </p:cNvPr>
-            <p:cNvPicPr>
-              <a:picLocks noChangeAspect="1"/>
-            </p:cNvPicPr>
-            <p:nvPr/>
-          </p:nvPicPr>
-          <p:blipFill>
-            <a:blip r:embed="rId4">
-              <a:extLst>
-                <a:ext uri="{96DAC541-7B7A-43D3-8B79-37D633B846F1}">
-                  <asvg:svgBlip xmlns:asvg="http://schemas.microsoft.com/office/drawing/2016/SVG/main" r:embed="rId5"/>
-                </a:ext>
-              </a:extLst>
-            </a:blip>
-            <a:stretch>
-              <a:fillRect/>
-            </a:stretch>
-          </p:blipFill>
-          <p:spPr>
-            <a:xfrm>
-              <a:off x="2293657" y="4087564"/>
-              <a:ext cx="914400" cy="914400"/>
-            </a:xfrm>
-            <a:prstGeom prst="rect">
-              <a:avLst/>
-            </a:prstGeom>
-          </p:spPr>
-        </p:pic>
-      </p:grpSp>
-      <p:cxnSp>
-        <p:nvCxnSpPr>
-          <p:cNvPr id="10" name="Straight Arrow Connector 9">
-            <a:extLst>
-              <a:ext uri="{FF2B5EF4-FFF2-40B4-BE49-F238E27FC236}">
-                <a16:creationId xmlns:a16="http://schemas.microsoft.com/office/drawing/2014/main" id="{35459D6D-8F63-59CB-8D0C-D7C91EDB0B71}"/>
-              </a:ext>
-            </a:extLst>
-          </p:cNvPr>
-          <p:cNvCxnSpPr>
-            <a:cxnSpLocks/>
-            <a:stCxn id="9" idx="1"/>
-            <a:endCxn id="5" idx="3"/>
-          </p:cNvCxnSpPr>
-          <p:nvPr/>
-        </p:nvCxnSpPr>
-        <p:spPr>
-          <a:xfrm flipH="1">
-            <a:off x="7237549" y="4848667"/>
-            <a:ext cx="2365153" cy="0"/>
-          </a:xfrm>
-          <a:prstGeom prst="straightConnector1">
-            <a:avLst/>
-          </a:prstGeom>
-          <a:ln w="38100">
-            <a:headEnd type="triangle"/>
-            <a:tailEnd type="triangle"/>
-          </a:ln>
-        </p:spPr>
-        <p:style>
-          <a:lnRef idx="2">
-            <a:schemeClr val="dk1"/>
-          </a:lnRef>
-          <a:fillRef idx="0">
-            <a:schemeClr val="dk1"/>
-          </a:fillRef>
-          <a:effectRef idx="1">
-            <a:schemeClr val="dk1"/>
-          </a:effectRef>
-          <a:fontRef idx="minor">
-            <a:schemeClr val="tx1"/>
-          </a:fontRef>
-        </p:style>
-      </p:cxnSp>
-    </p:spTree>
-    <p:extLst>
-      <p:ext uri="{BB962C8B-B14F-4D97-AF65-F5344CB8AC3E}">
-        <p14:creationId xmlns:p14="http://schemas.microsoft.com/office/powerpoint/2010/main" val="2802243993"/>
       </p:ext>
     </p:extLst>
   </p:cSld>
